--- a/slides/CSC336-Lecture-20-Cookies-and-Sessions.pptx
+++ b/slides/CSC336-Lecture-20-Cookies-and-Sessions.pptx
@@ -3192,79 +3192,44 @@
       </p:sp>
       <p:sp>
         <p:nvSpPr>
-          <p:cNvPr id="6" name="Text 4"/>
-          <p:cNvSpPr txBox="1"/>
-          <p:nvPr/>
-        </p:nvSpPr>
-        <p:spPr>
-          <a:xfrm>
-            <a:off x="640080" y="6446520"/>
-            <a:ext cx="8686800" cy="292608"/>
-          </a:xfrm>
-          <a:prstGeom prst="rect">
-            <a:avLst/>
-          </a:prstGeom>
-          <a:noFill/>
-          <a:ln/>
-        </p:spPr>
-        <p:txBody>
-          <a:bodyPr wrap="square" lIns="0" tIns="0" rIns="0" bIns="0" rtlCol="0" anchor="ctr"/>
-          <a:lstStyle/>
-          <a:p>
-            <a:pPr algn="l" indent="0" marL="0">
-              <a:buNone/>
-            </a:pPr>
-            <a:r>
-              <a:rPr lang="en-US" sz="900" dirty="0">
-                <a:solidFill>
-                  <a:srgbClr val="9AA3D8"/>
-                </a:solidFill>
-                <a:latin typeface="Calibri" pitchFamily="34" charset="0"/>
-                <a:ea typeface="Calibri" pitchFamily="34" charset="-122"/>
-                <a:cs typeface="Calibri" pitchFamily="34" charset="-120"/>
-              </a:rPr>
-              <a:t>Usman Akram  •  COMSATS University Islamabad</a:t>
-            </a:r>
-            <a:endParaRPr lang="en-US" sz="900" dirty="0"/>
-          </a:p>
-        </p:txBody>
-      </p:sp>
-      <p:sp>
-        <p:nvSpPr>
-          <p:cNvPr id="7" name="Text 5"/>
-          <p:cNvSpPr txBox="1"/>
-          <p:nvPr/>
-        </p:nvSpPr>
-        <p:spPr>
-          <a:xfrm>
-            <a:off x="11155680" y="6446520"/>
-            <a:ext cx="457200" cy="292608"/>
-          </a:xfrm>
-          <a:prstGeom prst="rect">
-            <a:avLst/>
-          </a:prstGeom>
-          <a:noFill/>
-          <a:ln/>
-        </p:spPr>
-        <p:txBody>
-          <a:bodyPr wrap="square" lIns="0" tIns="0" rIns="0" bIns="0" rtlCol="0" anchor="ctr"/>
-          <a:lstStyle/>
-          <a:p>
-            <a:pPr algn="r" indent="0" marL="0">
-              <a:buNone/>
-            </a:pPr>
-            <a:r>
-              <a:rPr lang="en-US" sz="900" dirty="0">
-                <a:solidFill>
-                  <a:srgbClr val="9AA3D8"/>
-                </a:solidFill>
-                <a:latin typeface="Calibri" pitchFamily="34" charset="0"/>
-                <a:ea typeface="Calibri" pitchFamily="34" charset="-122"/>
-                <a:cs typeface="Calibri" pitchFamily="34" charset="-120"/>
-              </a:rPr>
-              <a:t>1</a:t>
-            </a:r>
-            <a:endParaRPr lang="en-US" sz="900" dirty="0"/>
+          <p:cNvPr id="8" name="cuinotes-footer-mark"/>
+          <p:cNvSpPr txBox="1"/>
+          <p:nvPr/>
+        </p:nvSpPr>
+        <p:spPr>
+          <a:xfrm>
+            <a:off x="9951720" y="6455664"/>
+            <a:ext cx="2011680" cy="292608"/>
+          </a:xfrm>
+          <a:prstGeom prst="rect">
+            <a:avLst/>
+          </a:prstGeom>
+          <a:noFill/>
+        </p:spPr>
+        <p:txBody>
+          <a:bodyPr wrap="none" lIns="0" rIns="0" tIns="0" bIns="0">
+            <a:spAutoFit/>
+          </a:bodyPr>
+          <a:lstStyle/>
+          <a:p>
+            <a:pPr algn="r"/>
+            <a:r>
+              <a:rPr sz="1000">
+                <a:solidFill>
+                  <a:srgbClr val="8A939B"/>
+                </a:solidFill>
+                <a:hlinkClick r:id="rId3"/>
+              </a:rPr>
+              <a:t>cuinotes.com</a:t>
+            </a:r>
+            <a:r>
+              <a:rPr sz="1000">
+                <a:solidFill>
+                  <a:srgbClr val="8A939B"/>
+                </a:solidFill>
+              </a:rPr>
+              <a:t>  ·  1</a:t>
+            </a:r>
           </a:p>
         </p:txBody>
       </p:sp>
@@ -4238,79 +4203,44 @@
       </p:graphicFrame>
       <p:sp>
         <p:nvSpPr>
-          <p:cNvPr id="5" name="Text 2"/>
-          <p:cNvSpPr txBox="1"/>
-          <p:nvPr/>
-        </p:nvSpPr>
-        <p:spPr>
-          <a:xfrm>
-            <a:off x="640080" y="6446520"/>
-            <a:ext cx="8686800" cy="292608"/>
-          </a:xfrm>
-          <a:prstGeom prst="rect">
-            <a:avLst/>
-          </a:prstGeom>
-          <a:noFill/>
-          <a:ln/>
-        </p:spPr>
-        <p:txBody>
-          <a:bodyPr wrap="square" lIns="0" tIns="0" rIns="0" bIns="0" rtlCol="0" anchor="ctr"/>
-          <a:lstStyle/>
-          <a:p>
-            <a:pPr algn="l" indent="0" marL="0">
-              <a:buNone/>
-            </a:pPr>
-            <a:r>
-              <a:rPr lang="en-US" sz="900" dirty="0">
-                <a:solidFill>
-                  <a:srgbClr val="5D5D72"/>
-                </a:solidFill>
-                <a:latin typeface="Calibri" pitchFamily="34" charset="0"/>
-                <a:ea typeface="Calibri" pitchFamily="34" charset="-122"/>
-                <a:cs typeface="Calibri" pitchFamily="34" charset="-120"/>
-              </a:rPr>
-              <a:t>Usman Akram  •  COMSATS University Islamabad</a:t>
-            </a:r>
-            <a:endParaRPr lang="en-US" sz="900" dirty="0"/>
-          </a:p>
-        </p:txBody>
-      </p:sp>
-      <p:sp>
-        <p:nvSpPr>
-          <p:cNvPr id="6" name="Text 3"/>
-          <p:cNvSpPr txBox="1"/>
-          <p:nvPr/>
-        </p:nvSpPr>
-        <p:spPr>
-          <a:xfrm>
-            <a:off x="11155680" y="6446520"/>
-            <a:ext cx="457200" cy="292608"/>
-          </a:xfrm>
-          <a:prstGeom prst="rect">
-            <a:avLst/>
-          </a:prstGeom>
-          <a:noFill/>
-          <a:ln/>
-        </p:spPr>
-        <p:txBody>
-          <a:bodyPr wrap="square" lIns="0" tIns="0" rIns="0" bIns="0" rtlCol="0" anchor="ctr"/>
-          <a:lstStyle/>
-          <a:p>
-            <a:pPr algn="r" indent="0" marL="0">
-              <a:buNone/>
-            </a:pPr>
-            <a:r>
-              <a:rPr lang="en-US" sz="900" dirty="0">
-                <a:solidFill>
-                  <a:srgbClr val="5D5D72"/>
-                </a:solidFill>
-                <a:latin typeface="Calibri" pitchFamily="34" charset="0"/>
-                <a:ea typeface="Calibri" pitchFamily="34" charset="-122"/>
-                <a:cs typeface="Calibri" pitchFamily="34" charset="-120"/>
-              </a:rPr>
-              <a:t>10</a:t>
-            </a:r>
-            <a:endParaRPr lang="en-US" sz="900" dirty="0"/>
+          <p:cNvPr id="12" name="cuinotes-footer-mark"/>
+          <p:cNvSpPr txBox="1"/>
+          <p:nvPr/>
+        </p:nvSpPr>
+        <p:spPr>
+          <a:xfrm>
+            <a:off x="9951720" y="6455664"/>
+            <a:ext cx="2011680" cy="292608"/>
+          </a:xfrm>
+          <a:prstGeom prst="rect">
+            <a:avLst/>
+          </a:prstGeom>
+          <a:noFill/>
+        </p:spPr>
+        <p:txBody>
+          <a:bodyPr wrap="none" lIns="0" rIns="0" tIns="0" bIns="0">
+            <a:spAutoFit/>
+          </a:bodyPr>
+          <a:lstStyle/>
+          <a:p>
+            <a:pPr algn="r"/>
+            <a:r>
+              <a:rPr sz="1000">
+                <a:solidFill>
+                  <a:srgbClr val="8A939B"/>
+                </a:solidFill>
+                <a:hlinkClick r:id="rId3"/>
+              </a:rPr>
+              <a:t>cuinotes.com</a:t>
+            </a:r>
+            <a:r>
+              <a:rPr sz="1000">
+                <a:solidFill>
+                  <a:srgbClr val="8A939B"/>
+                </a:solidFill>
+              </a:rPr>
+              <a:t>  ·  10</a:t>
+            </a:r>
           </a:p>
         </p:txBody>
       </p:sp>
@@ -4445,6 +4375,10 @@
           </a:solidFill>
           <a:ln/>
         </p:spPr>
+        <p:txBody>
+          <a:bodyPr/>
+          <a:p/>
+        </p:txBody>
       </p:sp>
       <p:sp>
         <p:nvSpPr>
@@ -4689,79 +4623,44 @@
       </p:sp>
       <p:sp>
         <p:nvSpPr>
-          <p:cNvPr id="7" name="Text 5"/>
-          <p:cNvSpPr txBox="1"/>
-          <p:nvPr/>
-        </p:nvSpPr>
-        <p:spPr>
-          <a:xfrm>
-            <a:off x="640080" y="6446520"/>
-            <a:ext cx="8686800" cy="292608"/>
-          </a:xfrm>
-          <a:prstGeom prst="rect">
-            <a:avLst/>
-          </a:prstGeom>
-          <a:noFill/>
-          <a:ln/>
-        </p:spPr>
-        <p:txBody>
-          <a:bodyPr wrap="square" lIns="0" tIns="0" rIns="0" bIns="0" rtlCol="0" anchor="ctr"/>
-          <a:lstStyle/>
-          <a:p>
-            <a:pPr algn="l" indent="0" marL="0">
-              <a:buNone/>
-            </a:pPr>
-            <a:r>
-              <a:rPr lang="en-US" sz="900" dirty="0">
-                <a:solidFill>
-                  <a:srgbClr val="5D5D72"/>
-                </a:solidFill>
-                <a:latin typeface="Calibri" pitchFamily="34" charset="0"/>
-                <a:ea typeface="Calibri" pitchFamily="34" charset="-122"/>
-                <a:cs typeface="Calibri" pitchFamily="34" charset="-120"/>
-              </a:rPr>
-              <a:t>Usman Akram  •  COMSATS University Islamabad</a:t>
-            </a:r>
-            <a:endParaRPr lang="en-US" sz="900" dirty="0"/>
-          </a:p>
-        </p:txBody>
-      </p:sp>
-      <p:sp>
-        <p:nvSpPr>
-          <p:cNvPr id="8" name="Text 6"/>
-          <p:cNvSpPr txBox="1"/>
-          <p:nvPr/>
-        </p:nvSpPr>
-        <p:spPr>
-          <a:xfrm>
-            <a:off x="11155680" y="6446520"/>
-            <a:ext cx="457200" cy="292608"/>
-          </a:xfrm>
-          <a:prstGeom prst="rect">
-            <a:avLst/>
-          </a:prstGeom>
-          <a:noFill/>
-          <a:ln/>
-        </p:spPr>
-        <p:txBody>
-          <a:bodyPr wrap="square" lIns="0" tIns="0" rIns="0" bIns="0" rtlCol="0" anchor="ctr"/>
-          <a:lstStyle/>
-          <a:p>
-            <a:pPr algn="r" indent="0" marL="0">
-              <a:buNone/>
-            </a:pPr>
-            <a:r>
-              <a:rPr lang="en-US" sz="900" dirty="0">
-                <a:solidFill>
-                  <a:srgbClr val="5D5D72"/>
-                </a:solidFill>
-                <a:latin typeface="Calibri" pitchFamily="34" charset="0"/>
-                <a:ea typeface="Calibri" pitchFamily="34" charset="-122"/>
-                <a:cs typeface="Calibri" pitchFamily="34" charset="-120"/>
-              </a:rPr>
-              <a:t>11</a:t>
-            </a:r>
-            <a:endParaRPr lang="en-US" sz="900" dirty="0"/>
+          <p:cNvPr id="9" name="cuinotes-footer-mark"/>
+          <p:cNvSpPr txBox="1"/>
+          <p:nvPr/>
+        </p:nvSpPr>
+        <p:spPr>
+          <a:xfrm>
+            <a:off x="9951720" y="6455664"/>
+            <a:ext cx="2011680" cy="292608"/>
+          </a:xfrm>
+          <a:prstGeom prst="rect">
+            <a:avLst/>
+          </a:prstGeom>
+          <a:noFill/>
+        </p:spPr>
+        <p:txBody>
+          <a:bodyPr wrap="none" lIns="0" rIns="0" tIns="0" bIns="0">
+            <a:spAutoFit/>
+          </a:bodyPr>
+          <a:lstStyle/>
+          <a:p>
+            <a:pPr algn="r"/>
+            <a:r>
+              <a:rPr sz="1000">
+                <a:solidFill>
+                  <a:srgbClr val="8A939B"/>
+                </a:solidFill>
+                <a:hlinkClick r:id="rId3"/>
+              </a:rPr>
+              <a:t>cuinotes.com</a:t>
+            </a:r>
+            <a:r>
+              <a:rPr sz="1000">
+                <a:solidFill>
+                  <a:srgbClr val="8A939B"/>
+                </a:solidFill>
+              </a:rPr>
+              <a:t>  ·  11</a:t>
+            </a:r>
           </a:p>
         </p:txBody>
       </p:sp>
@@ -4901,6 +4800,10 @@
             <a:prstDash val="solid"/>
           </a:ln>
         </p:spPr>
+        <p:txBody>
+          <a:bodyPr/>
+          <a:p/>
+        </p:txBody>
       </p:sp>
       <p:sp>
         <p:nvSpPr>
@@ -4982,79 +4885,44 @@
       </p:sp>
       <p:sp>
         <p:nvSpPr>
-          <p:cNvPr id="7" name="Text 5"/>
-          <p:cNvSpPr txBox="1"/>
-          <p:nvPr/>
-        </p:nvSpPr>
-        <p:spPr>
-          <a:xfrm>
-            <a:off x="640080" y="6446520"/>
-            <a:ext cx="8686800" cy="292608"/>
-          </a:xfrm>
-          <a:prstGeom prst="rect">
-            <a:avLst/>
-          </a:prstGeom>
-          <a:noFill/>
-          <a:ln/>
-        </p:spPr>
-        <p:txBody>
-          <a:bodyPr wrap="square" lIns="0" tIns="0" rIns="0" bIns="0" rtlCol="0" anchor="ctr"/>
-          <a:lstStyle/>
-          <a:p>
-            <a:pPr algn="l" indent="0" marL="0">
-              <a:buNone/>
-            </a:pPr>
-            <a:r>
-              <a:rPr lang="en-US" sz="900" dirty="0">
-                <a:solidFill>
-                  <a:srgbClr val="5D5D72"/>
-                </a:solidFill>
-                <a:latin typeface="Calibri" pitchFamily="34" charset="0"/>
-                <a:ea typeface="Calibri" pitchFamily="34" charset="-122"/>
-                <a:cs typeface="Calibri" pitchFamily="34" charset="-120"/>
-              </a:rPr>
-              <a:t>Usman Akram  •  COMSATS University Islamabad</a:t>
-            </a:r>
-            <a:endParaRPr lang="en-US" sz="900" dirty="0"/>
-          </a:p>
-        </p:txBody>
-      </p:sp>
-      <p:sp>
-        <p:nvSpPr>
-          <p:cNvPr id="8" name="Text 6"/>
-          <p:cNvSpPr txBox="1"/>
-          <p:nvPr/>
-        </p:nvSpPr>
-        <p:spPr>
-          <a:xfrm>
-            <a:off x="11155680" y="6446520"/>
-            <a:ext cx="457200" cy="292608"/>
-          </a:xfrm>
-          <a:prstGeom prst="rect">
-            <a:avLst/>
-          </a:prstGeom>
-          <a:noFill/>
-          <a:ln/>
-        </p:spPr>
-        <p:txBody>
-          <a:bodyPr wrap="square" lIns="0" tIns="0" rIns="0" bIns="0" rtlCol="0" anchor="ctr"/>
-          <a:lstStyle/>
-          <a:p>
-            <a:pPr algn="r" indent="0" marL="0">
-              <a:buNone/>
-            </a:pPr>
-            <a:r>
-              <a:rPr lang="en-US" sz="900" dirty="0">
-                <a:solidFill>
-                  <a:srgbClr val="5D5D72"/>
-                </a:solidFill>
-                <a:latin typeface="Calibri" pitchFamily="34" charset="0"/>
-                <a:ea typeface="Calibri" pitchFamily="34" charset="-122"/>
-                <a:cs typeface="Calibri" pitchFamily="34" charset="-120"/>
-              </a:rPr>
-              <a:t>12</a:t>
-            </a:r>
-            <a:endParaRPr lang="en-US" sz="900" dirty="0"/>
+          <p:cNvPr id="9" name="cuinotes-footer-mark"/>
+          <p:cNvSpPr txBox="1"/>
+          <p:nvPr/>
+        </p:nvSpPr>
+        <p:spPr>
+          <a:xfrm>
+            <a:off x="9951720" y="6455664"/>
+            <a:ext cx="2011680" cy="292608"/>
+          </a:xfrm>
+          <a:prstGeom prst="rect">
+            <a:avLst/>
+          </a:prstGeom>
+          <a:noFill/>
+        </p:spPr>
+        <p:txBody>
+          <a:bodyPr wrap="none" lIns="0" rIns="0" tIns="0" bIns="0">
+            <a:spAutoFit/>
+          </a:bodyPr>
+          <a:lstStyle/>
+          <a:p>
+            <a:pPr algn="r"/>
+            <a:r>
+              <a:rPr sz="1000">
+                <a:solidFill>
+                  <a:srgbClr val="8A939B"/>
+                </a:solidFill>
+                <a:hlinkClick r:id="rId3"/>
+              </a:rPr>
+              <a:t>cuinotes.com</a:t>
+            </a:r>
+            <a:r>
+              <a:rPr sz="1000">
+                <a:solidFill>
+                  <a:srgbClr val="8A939B"/>
+                </a:solidFill>
+              </a:rPr>
+              <a:t>  ·  12</a:t>
+            </a:r>
           </a:p>
         </p:txBody>
       </p:sp>
@@ -5187,6 +5055,10 @@
           </a:solidFill>
           <a:ln/>
         </p:spPr>
+        <p:txBody>
+          <a:bodyPr/>
+          <a:p/>
+        </p:txBody>
       </p:sp>
       <p:sp>
         <p:nvSpPr>
@@ -5285,6 +5157,10 @@
           </a:solidFill>
           <a:ln/>
         </p:spPr>
+        <p:txBody>
+          <a:bodyPr/>
+          <a:p/>
+        </p:txBody>
       </p:sp>
       <p:sp>
         <p:nvSpPr>
@@ -5383,6 +5259,10 @@
           </a:solidFill>
           <a:ln/>
         </p:spPr>
+        <p:txBody>
+          <a:bodyPr/>
+          <a:p/>
+        </p:txBody>
       </p:sp>
       <p:sp>
         <p:nvSpPr>
@@ -5464,79 +5344,44 @@
       </p:sp>
       <p:sp>
         <p:nvSpPr>
-          <p:cNvPr id="13" name="Text 11"/>
-          <p:cNvSpPr txBox="1"/>
-          <p:nvPr/>
-        </p:nvSpPr>
-        <p:spPr>
-          <a:xfrm>
-            <a:off x="640080" y="6446520"/>
-            <a:ext cx="8686800" cy="292608"/>
-          </a:xfrm>
-          <a:prstGeom prst="rect">
-            <a:avLst/>
-          </a:prstGeom>
-          <a:noFill/>
-          <a:ln/>
-        </p:spPr>
-        <p:txBody>
-          <a:bodyPr wrap="square" lIns="0" tIns="0" rIns="0" bIns="0" rtlCol="0" anchor="ctr"/>
-          <a:lstStyle/>
-          <a:p>
-            <a:pPr algn="l" indent="0" marL="0">
-              <a:buNone/>
-            </a:pPr>
-            <a:r>
-              <a:rPr lang="en-US" sz="900" dirty="0">
-                <a:solidFill>
-                  <a:srgbClr val="5D5D72"/>
-                </a:solidFill>
-                <a:latin typeface="Calibri" pitchFamily="34" charset="0"/>
-                <a:ea typeface="Calibri" pitchFamily="34" charset="-122"/>
-                <a:cs typeface="Calibri" pitchFamily="34" charset="-120"/>
-              </a:rPr>
-              <a:t>Usman Akram  •  COMSATS University Islamabad</a:t>
-            </a:r>
-            <a:endParaRPr lang="en-US" sz="900" dirty="0"/>
-          </a:p>
-        </p:txBody>
-      </p:sp>
-      <p:sp>
-        <p:nvSpPr>
-          <p:cNvPr id="14" name="Text 12"/>
-          <p:cNvSpPr txBox="1"/>
-          <p:nvPr/>
-        </p:nvSpPr>
-        <p:spPr>
-          <a:xfrm>
-            <a:off x="11155680" y="6446520"/>
-            <a:ext cx="457200" cy="292608"/>
-          </a:xfrm>
-          <a:prstGeom prst="rect">
-            <a:avLst/>
-          </a:prstGeom>
-          <a:noFill/>
-          <a:ln/>
-        </p:spPr>
-        <p:txBody>
-          <a:bodyPr wrap="square" lIns="0" tIns="0" rIns="0" bIns="0" rtlCol="0" anchor="ctr"/>
-          <a:lstStyle/>
-          <a:p>
-            <a:pPr algn="r" indent="0" marL="0">
-              <a:buNone/>
-            </a:pPr>
-            <a:r>
-              <a:rPr lang="en-US" sz="900" dirty="0">
-                <a:solidFill>
-                  <a:srgbClr val="5D5D72"/>
-                </a:solidFill>
-                <a:latin typeface="Calibri" pitchFamily="34" charset="0"/>
-                <a:ea typeface="Calibri" pitchFamily="34" charset="-122"/>
-                <a:cs typeface="Calibri" pitchFamily="34" charset="-120"/>
-              </a:rPr>
-              <a:t>13</a:t>
-            </a:r>
-            <a:endParaRPr lang="en-US" sz="900" dirty="0"/>
+          <p:cNvPr id="15" name="cuinotes-footer-mark"/>
+          <p:cNvSpPr txBox="1"/>
+          <p:nvPr/>
+        </p:nvSpPr>
+        <p:spPr>
+          <a:xfrm>
+            <a:off x="9951720" y="6455664"/>
+            <a:ext cx="2011680" cy="292608"/>
+          </a:xfrm>
+          <a:prstGeom prst="rect">
+            <a:avLst/>
+          </a:prstGeom>
+          <a:noFill/>
+        </p:spPr>
+        <p:txBody>
+          <a:bodyPr wrap="none" lIns="0" rIns="0" tIns="0" bIns="0">
+            <a:spAutoFit/>
+          </a:bodyPr>
+          <a:lstStyle/>
+          <a:p>
+            <a:pPr algn="r"/>
+            <a:r>
+              <a:rPr sz="1000">
+                <a:solidFill>
+                  <a:srgbClr val="8A939B"/>
+                </a:solidFill>
+                <a:hlinkClick r:id="rId3"/>
+              </a:rPr>
+              <a:t>cuinotes.com</a:t>
+            </a:r>
+            <a:r>
+              <a:rPr sz="1000">
+                <a:solidFill>
+                  <a:srgbClr val="8A939B"/>
+                </a:solidFill>
+              </a:rPr>
+              <a:t>  ·  13</a:t>
+            </a:r>
           </a:p>
         </p:txBody>
       </p:sp>
@@ -5669,6 +5514,10 @@
           </a:solidFill>
           <a:ln/>
         </p:spPr>
+        <p:txBody>
+          <a:bodyPr/>
+          <a:p/>
+        </p:txBody>
       </p:sp>
       <p:sp>
         <p:nvSpPr>
@@ -5767,6 +5616,10 @@
           </a:solidFill>
           <a:ln/>
         </p:spPr>
+        <p:txBody>
+          <a:bodyPr/>
+          <a:p/>
+        </p:txBody>
       </p:sp>
       <p:sp>
         <p:nvSpPr>
@@ -5865,6 +5718,10 @@
           </a:solidFill>
           <a:ln/>
         </p:spPr>
+        <p:txBody>
+          <a:bodyPr/>
+          <a:p/>
+        </p:txBody>
       </p:sp>
       <p:sp>
         <p:nvSpPr>
@@ -5946,79 +5803,44 @@
       </p:sp>
       <p:sp>
         <p:nvSpPr>
-          <p:cNvPr id="13" name="Text 11"/>
-          <p:cNvSpPr txBox="1"/>
-          <p:nvPr/>
-        </p:nvSpPr>
-        <p:spPr>
-          <a:xfrm>
-            <a:off x="640080" y="6446520"/>
-            <a:ext cx="8686800" cy="292608"/>
-          </a:xfrm>
-          <a:prstGeom prst="rect">
-            <a:avLst/>
-          </a:prstGeom>
-          <a:noFill/>
-          <a:ln/>
-        </p:spPr>
-        <p:txBody>
-          <a:bodyPr wrap="square" lIns="0" tIns="0" rIns="0" bIns="0" rtlCol="0" anchor="ctr"/>
-          <a:lstStyle/>
-          <a:p>
-            <a:pPr algn="l" indent="0" marL="0">
-              <a:buNone/>
-            </a:pPr>
-            <a:r>
-              <a:rPr lang="en-US" sz="900" dirty="0">
-                <a:solidFill>
-                  <a:srgbClr val="5D5D72"/>
-                </a:solidFill>
-                <a:latin typeface="Calibri" pitchFamily="34" charset="0"/>
-                <a:ea typeface="Calibri" pitchFamily="34" charset="-122"/>
-                <a:cs typeface="Calibri" pitchFamily="34" charset="-120"/>
-              </a:rPr>
-              <a:t>Usman Akram  •  COMSATS University Islamabad</a:t>
-            </a:r>
-            <a:endParaRPr lang="en-US" sz="900" dirty="0"/>
-          </a:p>
-        </p:txBody>
-      </p:sp>
-      <p:sp>
-        <p:nvSpPr>
-          <p:cNvPr id="14" name="Text 12"/>
-          <p:cNvSpPr txBox="1"/>
-          <p:nvPr/>
-        </p:nvSpPr>
-        <p:spPr>
-          <a:xfrm>
-            <a:off x="11155680" y="6446520"/>
-            <a:ext cx="457200" cy="292608"/>
-          </a:xfrm>
-          <a:prstGeom prst="rect">
-            <a:avLst/>
-          </a:prstGeom>
-          <a:noFill/>
-          <a:ln/>
-        </p:spPr>
-        <p:txBody>
-          <a:bodyPr wrap="square" lIns="0" tIns="0" rIns="0" bIns="0" rtlCol="0" anchor="ctr"/>
-          <a:lstStyle/>
-          <a:p>
-            <a:pPr algn="r" indent="0" marL="0">
-              <a:buNone/>
-            </a:pPr>
-            <a:r>
-              <a:rPr lang="en-US" sz="900" dirty="0">
-                <a:solidFill>
-                  <a:srgbClr val="5D5D72"/>
-                </a:solidFill>
-                <a:latin typeface="Calibri" pitchFamily="34" charset="0"/>
-                <a:ea typeface="Calibri" pitchFamily="34" charset="-122"/>
-                <a:cs typeface="Calibri" pitchFamily="34" charset="-120"/>
-              </a:rPr>
-              <a:t>14</a:t>
-            </a:r>
-            <a:endParaRPr lang="en-US" sz="900" dirty="0"/>
+          <p:cNvPr id="15" name="cuinotes-footer-mark"/>
+          <p:cNvSpPr txBox="1"/>
+          <p:nvPr/>
+        </p:nvSpPr>
+        <p:spPr>
+          <a:xfrm>
+            <a:off x="9951720" y="6455664"/>
+            <a:ext cx="2011680" cy="292608"/>
+          </a:xfrm>
+          <a:prstGeom prst="rect">
+            <a:avLst/>
+          </a:prstGeom>
+          <a:noFill/>
+        </p:spPr>
+        <p:txBody>
+          <a:bodyPr wrap="none" lIns="0" rIns="0" tIns="0" bIns="0">
+            <a:spAutoFit/>
+          </a:bodyPr>
+          <a:lstStyle/>
+          <a:p>
+            <a:pPr algn="r"/>
+            <a:r>
+              <a:rPr sz="1000">
+                <a:solidFill>
+                  <a:srgbClr val="8A939B"/>
+                </a:solidFill>
+                <a:hlinkClick r:id="rId3"/>
+              </a:rPr>
+              <a:t>cuinotes.com</a:t>
+            </a:r>
+            <a:r>
+              <a:rPr sz="1000">
+                <a:solidFill>
+                  <a:srgbClr val="8A939B"/>
+                </a:solidFill>
+              </a:rPr>
+              <a:t>  ·  14</a:t>
+            </a:r>
           </a:p>
         </p:txBody>
       </p:sp>
@@ -6153,6 +5975,10 @@
           </a:solidFill>
           <a:ln/>
         </p:spPr>
+        <p:txBody>
+          <a:bodyPr/>
+          <a:p/>
+        </p:txBody>
       </p:sp>
       <p:sp>
         <p:nvSpPr>
@@ -6233,6 +6059,10 @@
             <a:tailEnd type="triangle"/>
           </a:ln>
         </p:spPr>
+        <p:txBody>
+          <a:bodyPr/>
+          <a:p/>
+        </p:txBody>
       </p:sp>
       <p:sp>
         <p:nvSpPr>
@@ -6255,6 +6085,10 @@
           </a:solidFill>
           <a:ln/>
         </p:spPr>
+        <p:txBody>
+          <a:bodyPr/>
+          <a:p/>
+        </p:txBody>
       </p:sp>
       <p:sp>
         <p:nvSpPr>
@@ -6335,6 +6169,10 @@
             <a:tailEnd type="triangle"/>
           </a:ln>
         </p:spPr>
+        <p:txBody>
+          <a:bodyPr/>
+          <a:p/>
+        </p:txBody>
       </p:sp>
       <p:sp>
         <p:nvSpPr>
@@ -6357,6 +6195,10 @@
           </a:solidFill>
           <a:ln/>
         </p:spPr>
+        <p:txBody>
+          <a:bodyPr/>
+          <a:p/>
+        </p:txBody>
       </p:sp>
       <p:sp>
         <p:nvSpPr>
@@ -6437,6 +6279,10 @@
             <a:tailEnd type="triangle"/>
           </a:ln>
         </p:spPr>
+        <p:txBody>
+          <a:bodyPr/>
+          <a:p/>
+        </p:txBody>
       </p:sp>
       <p:sp>
         <p:nvSpPr>
@@ -6459,6 +6305,10 @@
           </a:solidFill>
           <a:ln/>
         </p:spPr>
+        <p:txBody>
+          <a:bodyPr/>
+          <a:p/>
+        </p:txBody>
       </p:sp>
       <p:sp>
         <p:nvSpPr>
@@ -6539,6 +6389,10 @@
             <a:tailEnd type="triangle"/>
           </a:ln>
         </p:spPr>
+        <p:txBody>
+          <a:bodyPr/>
+          <a:p/>
+        </p:txBody>
       </p:sp>
       <p:sp>
         <p:nvSpPr>
@@ -6561,6 +6415,10 @@
           </a:solidFill>
           <a:ln/>
         </p:spPr>
+        <p:txBody>
+          <a:bodyPr/>
+          <a:p/>
+        </p:txBody>
       </p:sp>
       <p:sp>
         <p:nvSpPr>
@@ -6658,6 +6516,10 @@
             <a:tailEnd type="triangle"/>
           </a:ln>
         </p:spPr>
+        <p:txBody>
+          <a:bodyPr/>
+          <a:p/>
+        </p:txBody>
       </p:sp>
       <p:sp>
         <p:nvSpPr>
@@ -6680,6 +6542,10 @@
           </a:solidFill>
           <a:ln/>
         </p:spPr>
+        <p:txBody>
+          <a:bodyPr/>
+          <a:p/>
+        </p:txBody>
       </p:sp>
       <p:sp>
         <p:nvSpPr>
@@ -6778,79 +6644,44 @@
       </p:sp>
       <p:sp>
         <p:nvSpPr>
-          <p:cNvPr id="22" name="Text 20"/>
-          <p:cNvSpPr txBox="1"/>
-          <p:nvPr/>
-        </p:nvSpPr>
-        <p:spPr>
-          <a:xfrm>
-            <a:off x="640080" y="6446520"/>
-            <a:ext cx="8686800" cy="292608"/>
-          </a:xfrm>
-          <a:prstGeom prst="rect">
-            <a:avLst/>
-          </a:prstGeom>
-          <a:noFill/>
-          <a:ln/>
-        </p:spPr>
-        <p:txBody>
-          <a:bodyPr wrap="square" lIns="0" tIns="0" rIns="0" bIns="0" rtlCol="0" anchor="ctr"/>
-          <a:lstStyle/>
-          <a:p>
-            <a:pPr algn="l" indent="0" marL="0">
-              <a:buNone/>
-            </a:pPr>
-            <a:r>
-              <a:rPr lang="en-US" sz="900" dirty="0">
-                <a:solidFill>
-                  <a:srgbClr val="5D5D72"/>
-                </a:solidFill>
-                <a:latin typeface="Calibri" pitchFamily="34" charset="0"/>
-                <a:ea typeface="Calibri" pitchFamily="34" charset="-122"/>
-                <a:cs typeface="Calibri" pitchFamily="34" charset="-120"/>
-              </a:rPr>
-              <a:t>Usman Akram  •  COMSATS University Islamabad</a:t>
-            </a:r>
-            <a:endParaRPr lang="en-US" sz="900" dirty="0"/>
-          </a:p>
-        </p:txBody>
-      </p:sp>
-      <p:sp>
-        <p:nvSpPr>
-          <p:cNvPr id="23" name="Text 21"/>
-          <p:cNvSpPr txBox="1"/>
-          <p:nvPr/>
-        </p:nvSpPr>
-        <p:spPr>
-          <a:xfrm>
-            <a:off x="11155680" y="6446520"/>
-            <a:ext cx="457200" cy="292608"/>
-          </a:xfrm>
-          <a:prstGeom prst="rect">
-            <a:avLst/>
-          </a:prstGeom>
-          <a:noFill/>
-          <a:ln/>
-        </p:spPr>
-        <p:txBody>
-          <a:bodyPr wrap="square" lIns="0" tIns="0" rIns="0" bIns="0" rtlCol="0" anchor="ctr"/>
-          <a:lstStyle/>
-          <a:p>
-            <a:pPr algn="r" indent="0" marL="0">
-              <a:buNone/>
-            </a:pPr>
-            <a:r>
-              <a:rPr lang="en-US" sz="900" dirty="0">
-                <a:solidFill>
-                  <a:srgbClr val="5D5D72"/>
-                </a:solidFill>
-                <a:latin typeface="Calibri" pitchFamily="34" charset="0"/>
-                <a:ea typeface="Calibri" pitchFamily="34" charset="-122"/>
-                <a:cs typeface="Calibri" pitchFamily="34" charset="-120"/>
-              </a:rPr>
-              <a:t>15</a:t>
-            </a:r>
-            <a:endParaRPr lang="en-US" sz="900" dirty="0"/>
+          <p:cNvPr id="24" name="cuinotes-footer-mark"/>
+          <p:cNvSpPr txBox="1"/>
+          <p:nvPr/>
+        </p:nvSpPr>
+        <p:spPr>
+          <a:xfrm>
+            <a:off x="9951720" y="6455664"/>
+            <a:ext cx="2011680" cy="292608"/>
+          </a:xfrm>
+          <a:prstGeom prst="rect">
+            <a:avLst/>
+          </a:prstGeom>
+          <a:noFill/>
+        </p:spPr>
+        <p:txBody>
+          <a:bodyPr wrap="none" lIns="0" rIns="0" tIns="0" bIns="0">
+            <a:spAutoFit/>
+          </a:bodyPr>
+          <a:lstStyle/>
+          <a:p>
+            <a:pPr algn="r"/>
+            <a:r>
+              <a:rPr sz="1000">
+                <a:solidFill>
+                  <a:srgbClr val="8A939B"/>
+                </a:solidFill>
+                <a:hlinkClick r:id="rId3"/>
+              </a:rPr>
+              <a:t>cuinotes.com</a:t>
+            </a:r>
+            <a:r>
+              <a:rPr sz="1000">
+                <a:solidFill>
+                  <a:srgbClr val="8A939B"/>
+                </a:solidFill>
+              </a:rPr>
+              <a:t>  ·  15</a:t>
+            </a:r>
           </a:p>
         </p:txBody>
       </p:sp>
@@ -6985,6 +6816,10 @@
           </a:solidFill>
           <a:ln/>
         </p:spPr>
+        <p:txBody>
+          <a:bodyPr/>
+          <a:p/>
+        </p:txBody>
       </p:sp>
       <p:sp>
         <p:nvSpPr>
@@ -7299,79 +7134,44 @@
       </p:sp>
       <p:sp>
         <p:nvSpPr>
-          <p:cNvPr id="6" name="Text 4"/>
-          <p:cNvSpPr txBox="1"/>
-          <p:nvPr/>
-        </p:nvSpPr>
-        <p:spPr>
-          <a:xfrm>
-            <a:off x="640080" y="6446520"/>
-            <a:ext cx="8686800" cy="292608"/>
-          </a:xfrm>
-          <a:prstGeom prst="rect">
-            <a:avLst/>
-          </a:prstGeom>
-          <a:noFill/>
-          <a:ln/>
-        </p:spPr>
-        <p:txBody>
-          <a:bodyPr wrap="square" lIns="0" tIns="0" rIns="0" bIns="0" rtlCol="0" anchor="ctr"/>
-          <a:lstStyle/>
-          <a:p>
-            <a:pPr algn="l" indent="0" marL="0">
-              <a:buNone/>
-            </a:pPr>
-            <a:r>
-              <a:rPr lang="en-US" sz="900" dirty="0">
-                <a:solidFill>
-                  <a:srgbClr val="5D5D72"/>
-                </a:solidFill>
-                <a:latin typeface="Calibri" pitchFamily="34" charset="0"/>
-                <a:ea typeface="Calibri" pitchFamily="34" charset="-122"/>
-                <a:cs typeface="Calibri" pitchFamily="34" charset="-120"/>
-              </a:rPr>
-              <a:t>Usman Akram  •  COMSATS University Islamabad</a:t>
-            </a:r>
-            <a:endParaRPr lang="en-US" sz="900" dirty="0"/>
-          </a:p>
-        </p:txBody>
-      </p:sp>
-      <p:sp>
-        <p:nvSpPr>
-          <p:cNvPr id="7" name="Text 5"/>
-          <p:cNvSpPr txBox="1"/>
-          <p:nvPr/>
-        </p:nvSpPr>
-        <p:spPr>
-          <a:xfrm>
-            <a:off x="11155680" y="6446520"/>
-            <a:ext cx="457200" cy="292608"/>
-          </a:xfrm>
-          <a:prstGeom prst="rect">
-            <a:avLst/>
-          </a:prstGeom>
-          <a:noFill/>
-          <a:ln/>
-        </p:spPr>
-        <p:txBody>
-          <a:bodyPr wrap="square" lIns="0" tIns="0" rIns="0" bIns="0" rtlCol="0" anchor="ctr"/>
-          <a:lstStyle/>
-          <a:p>
-            <a:pPr algn="r" indent="0" marL="0">
-              <a:buNone/>
-            </a:pPr>
-            <a:r>
-              <a:rPr lang="en-US" sz="900" dirty="0">
-                <a:solidFill>
-                  <a:srgbClr val="5D5D72"/>
-                </a:solidFill>
-                <a:latin typeface="Calibri" pitchFamily="34" charset="0"/>
-                <a:ea typeface="Calibri" pitchFamily="34" charset="-122"/>
-                <a:cs typeface="Calibri" pitchFamily="34" charset="-120"/>
-              </a:rPr>
-              <a:t>16</a:t>
-            </a:r>
-            <a:endParaRPr lang="en-US" sz="900" dirty="0"/>
+          <p:cNvPr id="8" name="cuinotes-footer-mark"/>
+          <p:cNvSpPr txBox="1"/>
+          <p:nvPr/>
+        </p:nvSpPr>
+        <p:spPr>
+          <a:xfrm>
+            <a:off x="9951720" y="6455664"/>
+            <a:ext cx="2011680" cy="292608"/>
+          </a:xfrm>
+          <a:prstGeom prst="rect">
+            <a:avLst/>
+          </a:prstGeom>
+          <a:noFill/>
+        </p:spPr>
+        <p:txBody>
+          <a:bodyPr wrap="none" lIns="0" rIns="0" tIns="0" bIns="0">
+            <a:spAutoFit/>
+          </a:bodyPr>
+          <a:lstStyle/>
+          <a:p>
+            <a:pPr algn="r"/>
+            <a:r>
+              <a:rPr sz="1000">
+                <a:solidFill>
+                  <a:srgbClr val="8A939B"/>
+                </a:solidFill>
+                <a:hlinkClick r:id="rId3"/>
+              </a:rPr>
+              <a:t>cuinotes.com</a:t>
+            </a:r>
+            <a:r>
+              <a:rPr sz="1000">
+                <a:solidFill>
+                  <a:srgbClr val="8A939B"/>
+                </a:solidFill>
+              </a:rPr>
+              <a:t>  ·  16</a:t>
+            </a:r>
           </a:p>
         </p:txBody>
       </p:sp>
@@ -7506,6 +7306,10 @@
           </a:solidFill>
           <a:ln/>
         </p:spPr>
+        <p:txBody>
+          <a:bodyPr/>
+          <a:p/>
+        </p:txBody>
       </p:sp>
       <p:sp>
         <p:nvSpPr>
@@ -7780,79 +7584,44 @@
       </p:sp>
       <p:sp>
         <p:nvSpPr>
-          <p:cNvPr id="6" name="Text 4"/>
-          <p:cNvSpPr txBox="1"/>
-          <p:nvPr/>
-        </p:nvSpPr>
-        <p:spPr>
-          <a:xfrm>
-            <a:off x="640080" y="6446520"/>
-            <a:ext cx="8686800" cy="292608"/>
-          </a:xfrm>
-          <a:prstGeom prst="rect">
-            <a:avLst/>
-          </a:prstGeom>
-          <a:noFill/>
-          <a:ln/>
-        </p:spPr>
-        <p:txBody>
-          <a:bodyPr wrap="square" lIns="0" tIns="0" rIns="0" bIns="0" rtlCol="0" anchor="ctr"/>
-          <a:lstStyle/>
-          <a:p>
-            <a:pPr algn="l" indent="0" marL="0">
-              <a:buNone/>
-            </a:pPr>
-            <a:r>
-              <a:rPr lang="en-US" sz="900" dirty="0">
-                <a:solidFill>
-                  <a:srgbClr val="5D5D72"/>
-                </a:solidFill>
-                <a:latin typeface="Calibri" pitchFamily="34" charset="0"/>
-                <a:ea typeface="Calibri" pitchFamily="34" charset="-122"/>
-                <a:cs typeface="Calibri" pitchFamily="34" charset="-120"/>
-              </a:rPr>
-              <a:t>Usman Akram  •  COMSATS University Islamabad</a:t>
-            </a:r>
-            <a:endParaRPr lang="en-US" sz="900" dirty="0"/>
-          </a:p>
-        </p:txBody>
-      </p:sp>
-      <p:sp>
-        <p:nvSpPr>
-          <p:cNvPr id="7" name="Text 5"/>
-          <p:cNvSpPr txBox="1"/>
-          <p:nvPr/>
-        </p:nvSpPr>
-        <p:spPr>
-          <a:xfrm>
-            <a:off x="11155680" y="6446520"/>
-            <a:ext cx="457200" cy="292608"/>
-          </a:xfrm>
-          <a:prstGeom prst="rect">
-            <a:avLst/>
-          </a:prstGeom>
-          <a:noFill/>
-          <a:ln/>
-        </p:spPr>
-        <p:txBody>
-          <a:bodyPr wrap="square" lIns="0" tIns="0" rIns="0" bIns="0" rtlCol="0" anchor="ctr"/>
-          <a:lstStyle/>
-          <a:p>
-            <a:pPr algn="r" indent="0" marL="0">
-              <a:buNone/>
-            </a:pPr>
-            <a:r>
-              <a:rPr lang="en-US" sz="900" dirty="0">
-                <a:solidFill>
-                  <a:srgbClr val="5D5D72"/>
-                </a:solidFill>
-                <a:latin typeface="Calibri" pitchFamily="34" charset="0"/>
-                <a:ea typeface="Calibri" pitchFamily="34" charset="-122"/>
-                <a:cs typeface="Calibri" pitchFamily="34" charset="-120"/>
-              </a:rPr>
-              <a:t>17</a:t>
-            </a:r>
-            <a:endParaRPr lang="en-US" sz="900" dirty="0"/>
+          <p:cNvPr id="8" name="cuinotes-footer-mark"/>
+          <p:cNvSpPr txBox="1"/>
+          <p:nvPr/>
+        </p:nvSpPr>
+        <p:spPr>
+          <a:xfrm>
+            <a:off x="9951720" y="6455664"/>
+            <a:ext cx="2011680" cy="292608"/>
+          </a:xfrm>
+          <a:prstGeom prst="rect">
+            <a:avLst/>
+          </a:prstGeom>
+          <a:noFill/>
+        </p:spPr>
+        <p:txBody>
+          <a:bodyPr wrap="none" lIns="0" rIns="0" tIns="0" bIns="0">
+            <a:spAutoFit/>
+          </a:bodyPr>
+          <a:lstStyle/>
+          <a:p>
+            <a:pPr algn="r"/>
+            <a:r>
+              <a:rPr sz="1000">
+                <a:solidFill>
+                  <a:srgbClr val="8A939B"/>
+                </a:solidFill>
+                <a:hlinkClick r:id="rId3"/>
+              </a:rPr>
+              <a:t>cuinotes.com</a:t>
+            </a:r>
+            <a:r>
+              <a:rPr sz="1000">
+                <a:solidFill>
+                  <a:srgbClr val="8A939B"/>
+                </a:solidFill>
+              </a:rPr>
+              <a:t>  ·  17</a:t>
+            </a:r>
           </a:p>
         </p:txBody>
       </p:sp>
@@ -7987,6 +7756,10 @@
           </a:solidFill>
           <a:ln/>
         </p:spPr>
+        <p:txBody>
+          <a:bodyPr/>
+          <a:p/>
+        </p:txBody>
       </p:sp>
       <p:sp>
         <p:nvSpPr>
@@ -8180,79 +7953,44 @@
       </p:sp>
       <p:sp>
         <p:nvSpPr>
-          <p:cNvPr id="7" name="Text 5"/>
-          <p:cNvSpPr txBox="1"/>
-          <p:nvPr/>
-        </p:nvSpPr>
-        <p:spPr>
-          <a:xfrm>
-            <a:off x="640080" y="6446520"/>
-            <a:ext cx="8686800" cy="292608"/>
-          </a:xfrm>
-          <a:prstGeom prst="rect">
-            <a:avLst/>
-          </a:prstGeom>
-          <a:noFill/>
-          <a:ln/>
-        </p:spPr>
-        <p:txBody>
-          <a:bodyPr wrap="square" lIns="0" tIns="0" rIns="0" bIns="0" rtlCol="0" anchor="ctr"/>
-          <a:lstStyle/>
-          <a:p>
-            <a:pPr algn="l" indent="0" marL="0">
-              <a:buNone/>
-            </a:pPr>
-            <a:r>
-              <a:rPr lang="en-US" sz="900" dirty="0">
-                <a:solidFill>
-                  <a:srgbClr val="5D5D72"/>
-                </a:solidFill>
-                <a:latin typeface="Calibri" pitchFamily="34" charset="0"/>
-                <a:ea typeface="Calibri" pitchFamily="34" charset="-122"/>
-                <a:cs typeface="Calibri" pitchFamily="34" charset="-120"/>
-              </a:rPr>
-              <a:t>Usman Akram  •  COMSATS University Islamabad</a:t>
-            </a:r>
-            <a:endParaRPr lang="en-US" sz="900" dirty="0"/>
-          </a:p>
-        </p:txBody>
-      </p:sp>
-      <p:sp>
-        <p:nvSpPr>
-          <p:cNvPr id="8" name="Text 6"/>
-          <p:cNvSpPr txBox="1"/>
-          <p:nvPr/>
-        </p:nvSpPr>
-        <p:spPr>
-          <a:xfrm>
-            <a:off x="11155680" y="6446520"/>
-            <a:ext cx="457200" cy="292608"/>
-          </a:xfrm>
-          <a:prstGeom prst="rect">
-            <a:avLst/>
-          </a:prstGeom>
-          <a:noFill/>
-          <a:ln/>
-        </p:spPr>
-        <p:txBody>
-          <a:bodyPr wrap="square" lIns="0" tIns="0" rIns="0" bIns="0" rtlCol="0" anchor="ctr"/>
-          <a:lstStyle/>
-          <a:p>
-            <a:pPr algn="r" indent="0" marL="0">
-              <a:buNone/>
-            </a:pPr>
-            <a:r>
-              <a:rPr lang="en-US" sz="900" dirty="0">
-                <a:solidFill>
-                  <a:srgbClr val="5D5D72"/>
-                </a:solidFill>
-                <a:latin typeface="Calibri" pitchFamily="34" charset="0"/>
-                <a:ea typeface="Calibri" pitchFamily="34" charset="-122"/>
-                <a:cs typeface="Calibri" pitchFamily="34" charset="-120"/>
-              </a:rPr>
-              <a:t>18</a:t>
-            </a:r>
-            <a:endParaRPr lang="en-US" sz="900" dirty="0"/>
+          <p:cNvPr id="9" name="cuinotes-footer-mark"/>
+          <p:cNvSpPr txBox="1"/>
+          <p:nvPr/>
+        </p:nvSpPr>
+        <p:spPr>
+          <a:xfrm>
+            <a:off x="9951720" y="6455664"/>
+            <a:ext cx="2011680" cy="292608"/>
+          </a:xfrm>
+          <a:prstGeom prst="rect">
+            <a:avLst/>
+          </a:prstGeom>
+          <a:noFill/>
+        </p:spPr>
+        <p:txBody>
+          <a:bodyPr wrap="none" lIns="0" rIns="0" tIns="0" bIns="0">
+            <a:spAutoFit/>
+          </a:bodyPr>
+          <a:lstStyle/>
+          <a:p>
+            <a:pPr algn="r"/>
+            <a:r>
+              <a:rPr sz="1000">
+                <a:solidFill>
+                  <a:srgbClr val="8A939B"/>
+                </a:solidFill>
+                <a:hlinkClick r:id="rId3"/>
+              </a:rPr>
+              <a:t>cuinotes.com</a:t>
+            </a:r>
+            <a:r>
+              <a:rPr sz="1000">
+                <a:solidFill>
+                  <a:srgbClr val="8A939B"/>
+                </a:solidFill>
+              </a:rPr>
+              <a:t>  ·  18</a:t>
+            </a:r>
           </a:p>
         </p:txBody>
       </p:sp>
@@ -9624,79 +9362,44 @@
       </p:graphicFrame>
       <p:sp>
         <p:nvSpPr>
-          <p:cNvPr id="5" name="Text 2"/>
-          <p:cNvSpPr txBox="1"/>
-          <p:nvPr/>
-        </p:nvSpPr>
-        <p:spPr>
-          <a:xfrm>
-            <a:off x="640080" y="6446520"/>
-            <a:ext cx="8686800" cy="292608"/>
-          </a:xfrm>
-          <a:prstGeom prst="rect">
-            <a:avLst/>
-          </a:prstGeom>
-          <a:noFill/>
-          <a:ln/>
-        </p:spPr>
-        <p:txBody>
-          <a:bodyPr wrap="square" lIns="0" tIns="0" rIns="0" bIns="0" rtlCol="0" anchor="ctr"/>
-          <a:lstStyle/>
-          <a:p>
-            <a:pPr algn="l" indent="0" marL="0">
-              <a:buNone/>
-            </a:pPr>
-            <a:r>
-              <a:rPr lang="en-US" sz="900" dirty="0">
-                <a:solidFill>
-                  <a:srgbClr val="5D5D72"/>
-                </a:solidFill>
-                <a:latin typeface="Calibri" pitchFamily="34" charset="0"/>
-                <a:ea typeface="Calibri" pitchFamily="34" charset="-122"/>
-                <a:cs typeface="Calibri" pitchFamily="34" charset="-120"/>
-              </a:rPr>
-              <a:t>Usman Akram  •  COMSATS University Islamabad</a:t>
-            </a:r>
-            <a:endParaRPr lang="en-US" sz="900" dirty="0"/>
-          </a:p>
-        </p:txBody>
-      </p:sp>
-      <p:sp>
-        <p:nvSpPr>
-          <p:cNvPr id="6" name="Text 3"/>
-          <p:cNvSpPr txBox="1"/>
-          <p:nvPr/>
-        </p:nvSpPr>
-        <p:spPr>
-          <a:xfrm>
-            <a:off x="11155680" y="6446520"/>
-            <a:ext cx="457200" cy="292608"/>
-          </a:xfrm>
-          <a:prstGeom prst="rect">
-            <a:avLst/>
-          </a:prstGeom>
-          <a:noFill/>
-          <a:ln/>
-        </p:spPr>
-        <p:txBody>
-          <a:bodyPr wrap="square" lIns="0" tIns="0" rIns="0" bIns="0" rtlCol="0" anchor="ctr"/>
-          <a:lstStyle/>
-          <a:p>
-            <a:pPr algn="r" indent="0" marL="0">
-              <a:buNone/>
-            </a:pPr>
-            <a:r>
-              <a:rPr lang="en-US" sz="900" dirty="0">
-                <a:solidFill>
-                  <a:srgbClr val="5D5D72"/>
-                </a:solidFill>
-                <a:latin typeface="Calibri" pitchFamily="34" charset="0"/>
-                <a:ea typeface="Calibri" pitchFamily="34" charset="-122"/>
-                <a:cs typeface="Calibri" pitchFamily="34" charset="-120"/>
-              </a:rPr>
-              <a:t>19</a:t>
-            </a:r>
-            <a:endParaRPr lang="en-US" sz="900" dirty="0"/>
+          <p:cNvPr id="21" name="cuinotes-footer-mark"/>
+          <p:cNvSpPr txBox="1"/>
+          <p:nvPr/>
+        </p:nvSpPr>
+        <p:spPr>
+          <a:xfrm>
+            <a:off x="9951720" y="6455664"/>
+            <a:ext cx="2011680" cy="292608"/>
+          </a:xfrm>
+          <a:prstGeom prst="rect">
+            <a:avLst/>
+          </a:prstGeom>
+          <a:noFill/>
+        </p:spPr>
+        <p:txBody>
+          <a:bodyPr wrap="none" lIns="0" rIns="0" tIns="0" bIns="0">
+            <a:spAutoFit/>
+          </a:bodyPr>
+          <a:lstStyle/>
+          <a:p>
+            <a:pPr algn="r"/>
+            <a:r>
+              <a:rPr sz="1000">
+                <a:solidFill>
+                  <a:srgbClr val="8A939B"/>
+                </a:solidFill>
+                <a:hlinkClick r:id="rId3"/>
+              </a:rPr>
+              <a:t>cuinotes.com</a:t>
+            </a:r>
+            <a:r>
+              <a:rPr sz="1000">
+                <a:solidFill>
+                  <a:srgbClr val="8A939B"/>
+                </a:solidFill>
+              </a:rPr>
+              <a:t>  ·  19</a:t>
+            </a:r>
           </a:p>
         </p:txBody>
       </p:sp>
@@ -9829,6 +9532,10 @@
           </a:solidFill>
           <a:ln/>
         </p:spPr>
+        <p:txBody>
+          <a:bodyPr/>
+          <a:p/>
+        </p:txBody>
       </p:sp>
       <p:sp>
         <p:nvSpPr>
@@ -9927,6 +9634,10 @@
           </a:solidFill>
           <a:ln/>
         </p:spPr>
+        <p:txBody>
+          <a:bodyPr/>
+          <a:p/>
+        </p:txBody>
       </p:sp>
       <p:sp>
         <p:nvSpPr>
@@ -10025,6 +9736,10 @@
           </a:solidFill>
           <a:ln/>
         </p:spPr>
+        <p:txBody>
+          <a:bodyPr/>
+          <a:p/>
+        </p:txBody>
       </p:sp>
       <p:sp>
         <p:nvSpPr>
@@ -10123,6 +9838,10 @@
           </a:solidFill>
           <a:ln/>
         </p:spPr>
+        <p:txBody>
+          <a:bodyPr/>
+          <a:p/>
+        </p:txBody>
       </p:sp>
       <p:sp>
         <p:nvSpPr>
@@ -10221,6 +9940,10 @@
           </a:solidFill>
           <a:ln/>
         </p:spPr>
+        <p:txBody>
+          <a:bodyPr/>
+          <a:p/>
+        </p:txBody>
       </p:sp>
       <p:sp>
         <p:nvSpPr>
@@ -10319,6 +10042,10 @@
           </a:solidFill>
           <a:ln/>
         </p:spPr>
+        <p:txBody>
+          <a:bodyPr/>
+          <a:p/>
+        </p:txBody>
       </p:sp>
       <p:sp>
         <p:nvSpPr>
@@ -10400,79 +10127,44 @@
       </p:sp>
       <p:sp>
         <p:nvSpPr>
-          <p:cNvPr id="22" name="Text 20"/>
-          <p:cNvSpPr txBox="1"/>
-          <p:nvPr/>
-        </p:nvSpPr>
-        <p:spPr>
-          <a:xfrm>
-            <a:off x="640080" y="6446520"/>
-            <a:ext cx="8686800" cy="292608"/>
-          </a:xfrm>
-          <a:prstGeom prst="rect">
-            <a:avLst/>
-          </a:prstGeom>
-          <a:noFill/>
-          <a:ln/>
-        </p:spPr>
-        <p:txBody>
-          <a:bodyPr wrap="square" lIns="0" tIns="0" rIns="0" bIns="0" rtlCol="0" anchor="ctr"/>
-          <a:lstStyle/>
-          <a:p>
-            <a:pPr algn="l" indent="0" marL="0">
-              <a:buNone/>
-            </a:pPr>
-            <a:r>
-              <a:rPr lang="en-US" sz="900" dirty="0">
-                <a:solidFill>
-                  <a:srgbClr val="5D5D72"/>
-                </a:solidFill>
-                <a:latin typeface="Calibri" pitchFamily="34" charset="0"/>
-                <a:ea typeface="Calibri" pitchFamily="34" charset="-122"/>
-                <a:cs typeface="Calibri" pitchFamily="34" charset="-120"/>
-              </a:rPr>
-              <a:t>Usman Akram  •  COMSATS University Islamabad</a:t>
-            </a:r>
-            <a:endParaRPr lang="en-US" sz="900" dirty="0"/>
-          </a:p>
-        </p:txBody>
-      </p:sp>
-      <p:sp>
-        <p:nvSpPr>
-          <p:cNvPr id="23" name="Text 21"/>
-          <p:cNvSpPr txBox="1"/>
-          <p:nvPr/>
-        </p:nvSpPr>
-        <p:spPr>
-          <a:xfrm>
-            <a:off x="11155680" y="6446520"/>
-            <a:ext cx="457200" cy="292608"/>
-          </a:xfrm>
-          <a:prstGeom prst="rect">
-            <a:avLst/>
-          </a:prstGeom>
-          <a:noFill/>
-          <a:ln/>
-        </p:spPr>
-        <p:txBody>
-          <a:bodyPr wrap="square" lIns="0" tIns="0" rIns="0" bIns="0" rtlCol="0" anchor="ctr"/>
-          <a:lstStyle/>
-          <a:p>
-            <a:pPr algn="r" indent="0" marL="0">
-              <a:buNone/>
-            </a:pPr>
-            <a:r>
-              <a:rPr lang="en-US" sz="900" dirty="0">
-                <a:solidFill>
-                  <a:srgbClr val="5D5D72"/>
-                </a:solidFill>
-                <a:latin typeface="Calibri" pitchFamily="34" charset="0"/>
-                <a:ea typeface="Calibri" pitchFamily="34" charset="-122"/>
-                <a:cs typeface="Calibri" pitchFamily="34" charset="-120"/>
-              </a:rPr>
-              <a:t>2</a:t>
-            </a:r>
-            <a:endParaRPr lang="en-US" sz="900" dirty="0"/>
+          <p:cNvPr id="24" name="cuinotes-footer-mark"/>
+          <p:cNvSpPr txBox="1"/>
+          <p:nvPr/>
+        </p:nvSpPr>
+        <p:spPr>
+          <a:xfrm>
+            <a:off x="9951720" y="6455664"/>
+            <a:ext cx="2011680" cy="292608"/>
+          </a:xfrm>
+          <a:prstGeom prst="rect">
+            <a:avLst/>
+          </a:prstGeom>
+          <a:noFill/>
+        </p:spPr>
+        <p:txBody>
+          <a:bodyPr wrap="none" lIns="0" rIns="0" tIns="0" bIns="0">
+            <a:spAutoFit/>
+          </a:bodyPr>
+          <a:lstStyle/>
+          <a:p>
+            <a:pPr algn="r"/>
+            <a:r>
+              <a:rPr sz="1000">
+                <a:solidFill>
+                  <a:srgbClr val="8A939B"/>
+                </a:solidFill>
+                <a:hlinkClick r:id="rId3"/>
+              </a:rPr>
+              <a:t>cuinotes.com</a:t>
+            </a:r>
+            <a:r>
+              <a:rPr sz="1000">
+                <a:solidFill>
+                  <a:srgbClr val="8A939B"/>
+                </a:solidFill>
+              </a:rPr>
+              <a:t>  ·  2</a:t>
+            </a:r>
           </a:p>
         </p:txBody>
       </p:sp>
@@ -10612,6 +10304,10 @@
             <a:prstDash val="solid"/>
           </a:ln>
         </p:spPr>
+        <p:txBody>
+          <a:bodyPr/>
+          <a:p/>
+        </p:txBody>
       </p:sp>
       <p:sp>
         <p:nvSpPr>
@@ -10693,79 +10389,44 @@
       </p:sp>
       <p:sp>
         <p:nvSpPr>
-          <p:cNvPr id="7" name="Text 5"/>
-          <p:cNvSpPr txBox="1"/>
-          <p:nvPr/>
-        </p:nvSpPr>
-        <p:spPr>
-          <a:xfrm>
-            <a:off x="640080" y="6446520"/>
-            <a:ext cx="8686800" cy="292608"/>
-          </a:xfrm>
-          <a:prstGeom prst="rect">
-            <a:avLst/>
-          </a:prstGeom>
-          <a:noFill/>
-          <a:ln/>
-        </p:spPr>
-        <p:txBody>
-          <a:bodyPr wrap="square" lIns="0" tIns="0" rIns="0" bIns="0" rtlCol="0" anchor="ctr"/>
-          <a:lstStyle/>
-          <a:p>
-            <a:pPr algn="l" indent="0" marL="0">
-              <a:buNone/>
-            </a:pPr>
-            <a:r>
-              <a:rPr lang="en-US" sz="900" dirty="0">
-                <a:solidFill>
-                  <a:srgbClr val="5D5D72"/>
-                </a:solidFill>
-                <a:latin typeface="Calibri" pitchFamily="34" charset="0"/>
-                <a:ea typeface="Calibri" pitchFamily="34" charset="-122"/>
-                <a:cs typeface="Calibri" pitchFamily="34" charset="-120"/>
-              </a:rPr>
-              <a:t>Usman Akram  •  COMSATS University Islamabad</a:t>
-            </a:r>
-            <a:endParaRPr lang="en-US" sz="900" dirty="0"/>
-          </a:p>
-        </p:txBody>
-      </p:sp>
-      <p:sp>
-        <p:nvSpPr>
-          <p:cNvPr id="8" name="Text 6"/>
-          <p:cNvSpPr txBox="1"/>
-          <p:nvPr/>
-        </p:nvSpPr>
-        <p:spPr>
-          <a:xfrm>
-            <a:off x="11155680" y="6446520"/>
-            <a:ext cx="457200" cy="292608"/>
-          </a:xfrm>
-          <a:prstGeom prst="rect">
-            <a:avLst/>
-          </a:prstGeom>
-          <a:noFill/>
-          <a:ln/>
-        </p:spPr>
-        <p:txBody>
-          <a:bodyPr wrap="square" lIns="0" tIns="0" rIns="0" bIns="0" rtlCol="0" anchor="ctr"/>
-          <a:lstStyle/>
-          <a:p>
-            <a:pPr algn="r" indent="0" marL="0">
-              <a:buNone/>
-            </a:pPr>
-            <a:r>
-              <a:rPr lang="en-US" sz="900" dirty="0">
-                <a:solidFill>
-                  <a:srgbClr val="5D5D72"/>
-                </a:solidFill>
-                <a:latin typeface="Calibri" pitchFamily="34" charset="0"/>
-                <a:ea typeface="Calibri" pitchFamily="34" charset="-122"/>
-                <a:cs typeface="Calibri" pitchFamily="34" charset="-120"/>
-              </a:rPr>
-              <a:t>20</a:t>
-            </a:r>
-            <a:endParaRPr lang="en-US" sz="900" dirty="0"/>
+          <p:cNvPr id="9" name="cuinotes-footer-mark"/>
+          <p:cNvSpPr txBox="1"/>
+          <p:nvPr/>
+        </p:nvSpPr>
+        <p:spPr>
+          <a:xfrm>
+            <a:off x="9951720" y="6455664"/>
+            <a:ext cx="2011680" cy="292608"/>
+          </a:xfrm>
+          <a:prstGeom prst="rect">
+            <a:avLst/>
+          </a:prstGeom>
+          <a:noFill/>
+        </p:spPr>
+        <p:txBody>
+          <a:bodyPr wrap="none" lIns="0" rIns="0" tIns="0" bIns="0">
+            <a:spAutoFit/>
+          </a:bodyPr>
+          <a:lstStyle/>
+          <a:p>
+            <a:pPr algn="r"/>
+            <a:r>
+              <a:rPr sz="1000">
+                <a:solidFill>
+                  <a:srgbClr val="8A939B"/>
+                </a:solidFill>
+                <a:hlinkClick r:id="rId3"/>
+              </a:rPr>
+              <a:t>cuinotes.com</a:t>
+            </a:r>
+            <a:r>
+              <a:rPr sz="1000">
+                <a:solidFill>
+                  <a:srgbClr val="8A939B"/>
+                </a:solidFill>
+              </a:rPr>
+              <a:t>  ·  20</a:t>
+            </a:r>
           </a:p>
         </p:txBody>
       </p:sp>
@@ -10898,6 +10559,10 @@
           </a:solidFill>
           <a:ln/>
         </p:spPr>
+        <p:txBody>
+          <a:bodyPr/>
+          <a:p/>
+        </p:txBody>
       </p:sp>
       <p:sp>
         <p:nvSpPr>
@@ -10996,6 +10661,10 @@
           </a:solidFill>
           <a:ln/>
         </p:spPr>
+        <p:txBody>
+          <a:bodyPr/>
+          <a:p/>
+        </p:txBody>
       </p:sp>
       <p:sp>
         <p:nvSpPr>
@@ -11094,6 +10763,10 @@
           </a:solidFill>
           <a:ln/>
         </p:spPr>
+        <p:txBody>
+          <a:bodyPr/>
+          <a:p/>
+        </p:txBody>
       </p:sp>
       <p:sp>
         <p:nvSpPr>
@@ -11192,6 +10865,10 @@
           </a:solidFill>
           <a:ln/>
         </p:spPr>
+        <p:txBody>
+          <a:bodyPr/>
+          <a:p/>
+        </p:txBody>
       </p:sp>
       <p:sp>
         <p:nvSpPr>
@@ -11290,6 +10967,10 @@
           </a:solidFill>
           <a:ln/>
         </p:spPr>
+        <p:txBody>
+          <a:bodyPr/>
+          <a:p/>
+        </p:txBody>
       </p:sp>
       <p:sp>
         <p:nvSpPr>
@@ -11388,6 +11069,10 @@
           </a:solidFill>
           <a:ln/>
         </p:spPr>
+        <p:txBody>
+          <a:bodyPr/>
+          <a:p/>
+        </p:txBody>
       </p:sp>
       <p:sp>
         <p:nvSpPr>
@@ -11469,79 +11154,44 @@
       </p:sp>
       <p:sp>
         <p:nvSpPr>
-          <p:cNvPr id="22" name="Text 20"/>
-          <p:cNvSpPr txBox="1"/>
-          <p:nvPr/>
-        </p:nvSpPr>
-        <p:spPr>
-          <a:xfrm>
-            <a:off x="640080" y="6446520"/>
-            <a:ext cx="8686800" cy="292608"/>
-          </a:xfrm>
-          <a:prstGeom prst="rect">
-            <a:avLst/>
-          </a:prstGeom>
-          <a:noFill/>
-          <a:ln/>
-        </p:spPr>
-        <p:txBody>
-          <a:bodyPr wrap="square" lIns="0" tIns="0" rIns="0" bIns="0" rtlCol="0" anchor="ctr"/>
-          <a:lstStyle/>
-          <a:p>
-            <a:pPr algn="l" indent="0" marL="0">
-              <a:buNone/>
-            </a:pPr>
-            <a:r>
-              <a:rPr lang="en-US" sz="900" dirty="0">
-                <a:solidFill>
-                  <a:srgbClr val="5D5D72"/>
-                </a:solidFill>
-                <a:latin typeface="Calibri" pitchFamily="34" charset="0"/>
-                <a:ea typeface="Calibri" pitchFamily="34" charset="-122"/>
-                <a:cs typeface="Calibri" pitchFamily="34" charset="-120"/>
-              </a:rPr>
-              <a:t>Usman Akram  •  COMSATS University Islamabad</a:t>
-            </a:r>
-            <a:endParaRPr lang="en-US" sz="900" dirty="0"/>
-          </a:p>
-        </p:txBody>
-      </p:sp>
-      <p:sp>
-        <p:nvSpPr>
-          <p:cNvPr id="23" name="Text 21"/>
-          <p:cNvSpPr txBox="1"/>
-          <p:nvPr/>
-        </p:nvSpPr>
-        <p:spPr>
-          <a:xfrm>
-            <a:off x="11155680" y="6446520"/>
-            <a:ext cx="457200" cy="292608"/>
-          </a:xfrm>
-          <a:prstGeom prst="rect">
-            <a:avLst/>
-          </a:prstGeom>
-          <a:noFill/>
-          <a:ln/>
-        </p:spPr>
-        <p:txBody>
-          <a:bodyPr wrap="square" lIns="0" tIns="0" rIns="0" bIns="0" rtlCol="0" anchor="ctr"/>
-          <a:lstStyle/>
-          <a:p>
-            <a:pPr algn="r" indent="0" marL="0">
-              <a:buNone/>
-            </a:pPr>
-            <a:r>
-              <a:rPr lang="en-US" sz="900" dirty="0">
-                <a:solidFill>
-                  <a:srgbClr val="5D5D72"/>
-                </a:solidFill>
-                <a:latin typeface="Calibri" pitchFamily="34" charset="0"/>
-                <a:ea typeface="Calibri" pitchFamily="34" charset="-122"/>
-                <a:cs typeface="Calibri" pitchFamily="34" charset="-120"/>
-              </a:rPr>
-              <a:t>21</a:t>
-            </a:r>
-            <a:endParaRPr lang="en-US" sz="900" dirty="0"/>
+          <p:cNvPr id="24" name="cuinotes-footer-mark"/>
+          <p:cNvSpPr txBox="1"/>
+          <p:nvPr/>
+        </p:nvSpPr>
+        <p:spPr>
+          <a:xfrm>
+            <a:off x="9951720" y="6455664"/>
+            <a:ext cx="2011680" cy="292608"/>
+          </a:xfrm>
+          <a:prstGeom prst="rect">
+            <a:avLst/>
+          </a:prstGeom>
+          <a:noFill/>
+        </p:spPr>
+        <p:txBody>
+          <a:bodyPr wrap="none" lIns="0" rIns="0" tIns="0" bIns="0">
+            <a:spAutoFit/>
+          </a:bodyPr>
+          <a:lstStyle/>
+          <a:p>
+            <a:pPr algn="r"/>
+            <a:r>
+              <a:rPr sz="1000">
+                <a:solidFill>
+                  <a:srgbClr val="8A939B"/>
+                </a:solidFill>
+                <a:hlinkClick r:id="rId3"/>
+              </a:rPr>
+              <a:t>cuinotes.com</a:t>
+            </a:r>
+            <a:r>
+              <a:rPr sz="1000">
+                <a:solidFill>
+                  <a:srgbClr val="8A939B"/>
+                </a:solidFill>
+              </a:rPr>
+              <a:t>  ·  21</a:t>
+            </a:r>
           </a:p>
         </p:txBody>
       </p:sp>
@@ -11676,6 +11326,10 @@
           </a:solidFill>
           <a:ln/>
         </p:spPr>
+        <p:txBody>
+          <a:bodyPr/>
+          <a:p/>
+        </p:txBody>
       </p:sp>
       <p:sp>
         <p:nvSpPr>
@@ -11756,6 +11410,10 @@
             <a:tailEnd type="triangle"/>
           </a:ln>
         </p:spPr>
+        <p:txBody>
+          <a:bodyPr/>
+          <a:p/>
+        </p:txBody>
       </p:sp>
       <p:sp>
         <p:nvSpPr>
@@ -11778,6 +11436,10 @@
           </a:solidFill>
           <a:ln/>
         </p:spPr>
+        <p:txBody>
+          <a:bodyPr/>
+          <a:p/>
+        </p:txBody>
       </p:sp>
       <p:sp>
         <p:nvSpPr>
@@ -11875,6 +11537,10 @@
             <a:tailEnd type="triangle"/>
           </a:ln>
         </p:spPr>
+        <p:txBody>
+          <a:bodyPr/>
+          <a:p/>
+        </p:txBody>
       </p:sp>
       <p:sp>
         <p:nvSpPr>
@@ -11897,6 +11563,10 @@
           </a:solidFill>
           <a:ln/>
         </p:spPr>
+        <p:txBody>
+          <a:bodyPr/>
+          <a:p/>
+        </p:txBody>
       </p:sp>
       <p:sp>
         <p:nvSpPr>
@@ -11977,6 +11647,10 @@
             <a:tailEnd type="triangle"/>
           </a:ln>
         </p:spPr>
+        <p:txBody>
+          <a:bodyPr/>
+          <a:p/>
+        </p:txBody>
       </p:sp>
       <p:sp>
         <p:nvSpPr>
@@ -11999,6 +11673,10 @@
           </a:solidFill>
           <a:ln/>
         </p:spPr>
+        <p:txBody>
+          <a:bodyPr/>
+          <a:p/>
+        </p:txBody>
       </p:sp>
       <p:sp>
         <p:nvSpPr>
@@ -12096,6 +11774,10 @@
             <a:tailEnd type="triangle"/>
           </a:ln>
         </p:spPr>
+        <p:txBody>
+          <a:bodyPr/>
+          <a:p/>
+        </p:txBody>
       </p:sp>
       <p:sp>
         <p:nvSpPr>
@@ -12118,6 +11800,10 @@
           </a:solidFill>
           <a:ln/>
         </p:spPr>
+        <p:txBody>
+          <a:bodyPr/>
+          <a:p/>
+        </p:txBody>
       </p:sp>
       <p:sp>
         <p:nvSpPr>
@@ -12198,6 +11884,10 @@
             <a:tailEnd type="triangle"/>
           </a:ln>
         </p:spPr>
+        <p:txBody>
+          <a:bodyPr/>
+          <a:p/>
+        </p:txBody>
       </p:sp>
       <p:sp>
         <p:nvSpPr>
@@ -12220,6 +11910,10 @@
           </a:solidFill>
           <a:ln/>
         </p:spPr>
+        <p:txBody>
+          <a:bodyPr/>
+          <a:p/>
+        </p:txBody>
       </p:sp>
       <p:sp>
         <p:nvSpPr>
@@ -12318,79 +12012,44 @@
       </p:sp>
       <p:sp>
         <p:nvSpPr>
-          <p:cNvPr id="22" name="Text 20"/>
-          <p:cNvSpPr txBox="1"/>
-          <p:nvPr/>
-        </p:nvSpPr>
-        <p:spPr>
-          <a:xfrm>
-            <a:off x="640080" y="6446520"/>
-            <a:ext cx="8686800" cy="292608"/>
-          </a:xfrm>
-          <a:prstGeom prst="rect">
-            <a:avLst/>
-          </a:prstGeom>
-          <a:noFill/>
-          <a:ln/>
-        </p:spPr>
-        <p:txBody>
-          <a:bodyPr wrap="square" lIns="0" tIns="0" rIns="0" bIns="0" rtlCol="0" anchor="ctr"/>
-          <a:lstStyle/>
-          <a:p>
-            <a:pPr algn="l" indent="0" marL="0">
-              <a:buNone/>
-            </a:pPr>
-            <a:r>
-              <a:rPr lang="en-US" sz="900" dirty="0">
-                <a:solidFill>
-                  <a:srgbClr val="5D5D72"/>
-                </a:solidFill>
-                <a:latin typeface="Calibri" pitchFamily="34" charset="0"/>
-                <a:ea typeface="Calibri" pitchFamily="34" charset="-122"/>
-                <a:cs typeface="Calibri" pitchFamily="34" charset="-120"/>
-              </a:rPr>
-              <a:t>Usman Akram  •  COMSATS University Islamabad</a:t>
-            </a:r>
-            <a:endParaRPr lang="en-US" sz="900" dirty="0"/>
-          </a:p>
-        </p:txBody>
-      </p:sp>
-      <p:sp>
-        <p:nvSpPr>
-          <p:cNvPr id="23" name="Text 21"/>
-          <p:cNvSpPr txBox="1"/>
-          <p:nvPr/>
-        </p:nvSpPr>
-        <p:spPr>
-          <a:xfrm>
-            <a:off x="11155680" y="6446520"/>
-            <a:ext cx="457200" cy="292608"/>
-          </a:xfrm>
-          <a:prstGeom prst="rect">
-            <a:avLst/>
-          </a:prstGeom>
-          <a:noFill/>
-          <a:ln/>
-        </p:spPr>
-        <p:txBody>
-          <a:bodyPr wrap="square" lIns="0" tIns="0" rIns="0" bIns="0" rtlCol="0" anchor="ctr"/>
-          <a:lstStyle/>
-          <a:p>
-            <a:pPr algn="r" indent="0" marL="0">
-              <a:buNone/>
-            </a:pPr>
-            <a:r>
-              <a:rPr lang="en-US" sz="900" dirty="0">
-                <a:solidFill>
-                  <a:srgbClr val="5D5D72"/>
-                </a:solidFill>
-                <a:latin typeface="Calibri" pitchFamily="34" charset="0"/>
-                <a:ea typeface="Calibri" pitchFamily="34" charset="-122"/>
-                <a:cs typeface="Calibri" pitchFamily="34" charset="-120"/>
-              </a:rPr>
-              <a:t>22</a:t>
-            </a:r>
-            <a:endParaRPr lang="en-US" sz="900" dirty="0"/>
+          <p:cNvPr id="24" name="cuinotes-footer-mark"/>
+          <p:cNvSpPr txBox="1"/>
+          <p:nvPr/>
+        </p:nvSpPr>
+        <p:spPr>
+          <a:xfrm>
+            <a:off x="9951720" y="6455664"/>
+            <a:ext cx="2011680" cy="292608"/>
+          </a:xfrm>
+          <a:prstGeom prst="rect">
+            <a:avLst/>
+          </a:prstGeom>
+          <a:noFill/>
+        </p:spPr>
+        <p:txBody>
+          <a:bodyPr wrap="none" lIns="0" rIns="0" tIns="0" bIns="0">
+            <a:spAutoFit/>
+          </a:bodyPr>
+          <a:lstStyle/>
+          <a:p>
+            <a:pPr algn="r"/>
+            <a:r>
+              <a:rPr sz="1000">
+                <a:solidFill>
+                  <a:srgbClr val="8A939B"/>
+                </a:solidFill>
+                <a:hlinkClick r:id="rId3"/>
+              </a:rPr>
+              <a:t>cuinotes.com</a:t>
+            </a:r>
+            <a:r>
+              <a:rPr sz="1000">
+                <a:solidFill>
+                  <a:srgbClr val="8A939B"/>
+                </a:solidFill>
+              </a:rPr>
+              <a:t>  ·  22</a:t>
+            </a:r>
           </a:p>
         </p:txBody>
       </p:sp>
@@ -12523,6 +12182,10 @@
           </a:solidFill>
           <a:ln/>
         </p:spPr>
+        <p:txBody>
+          <a:bodyPr/>
+          <a:p/>
+        </p:txBody>
       </p:sp>
       <p:sp>
         <p:nvSpPr>
@@ -12582,6 +12245,10 @@
           </a:solidFill>
           <a:ln/>
         </p:spPr>
+        <p:txBody>
+          <a:bodyPr/>
+          <a:p/>
+        </p:txBody>
       </p:sp>
       <p:sp>
         <p:nvSpPr>
@@ -12641,6 +12308,10 @@
           </a:solidFill>
           <a:ln/>
         </p:spPr>
+        <p:txBody>
+          <a:bodyPr/>
+          <a:p/>
+        </p:txBody>
       </p:sp>
       <p:sp>
         <p:nvSpPr>
@@ -12700,6 +12371,10 @@
           </a:solidFill>
           <a:ln/>
         </p:spPr>
+        <p:txBody>
+          <a:bodyPr/>
+          <a:p/>
+        </p:txBody>
       </p:sp>
       <p:sp>
         <p:nvSpPr>
@@ -12742,79 +12417,44 @@
       </p:sp>
       <p:sp>
         <p:nvSpPr>
-          <p:cNvPr id="12" name="Text 10"/>
-          <p:cNvSpPr txBox="1"/>
-          <p:nvPr/>
-        </p:nvSpPr>
-        <p:spPr>
-          <a:xfrm>
-            <a:off x="640080" y="6446520"/>
-            <a:ext cx="8686800" cy="292608"/>
-          </a:xfrm>
-          <a:prstGeom prst="rect">
-            <a:avLst/>
-          </a:prstGeom>
-          <a:noFill/>
-          <a:ln/>
-        </p:spPr>
-        <p:txBody>
-          <a:bodyPr wrap="square" lIns="0" tIns="0" rIns="0" bIns="0" rtlCol="0" anchor="ctr"/>
-          <a:lstStyle/>
-          <a:p>
-            <a:pPr algn="l" indent="0" marL="0">
-              <a:buNone/>
-            </a:pPr>
-            <a:r>
-              <a:rPr lang="en-US" sz="900" dirty="0">
-                <a:solidFill>
-                  <a:srgbClr val="5D5D72"/>
-                </a:solidFill>
-                <a:latin typeface="Calibri" pitchFamily="34" charset="0"/>
-                <a:ea typeface="Calibri" pitchFamily="34" charset="-122"/>
-                <a:cs typeface="Calibri" pitchFamily="34" charset="-120"/>
-              </a:rPr>
-              <a:t>Usman Akram  •  COMSATS University Islamabad</a:t>
-            </a:r>
-            <a:endParaRPr lang="en-US" sz="900" dirty="0"/>
-          </a:p>
-        </p:txBody>
-      </p:sp>
-      <p:sp>
-        <p:nvSpPr>
-          <p:cNvPr id="13" name="Text 11"/>
-          <p:cNvSpPr txBox="1"/>
-          <p:nvPr/>
-        </p:nvSpPr>
-        <p:spPr>
-          <a:xfrm>
-            <a:off x="11155680" y="6446520"/>
-            <a:ext cx="457200" cy="292608"/>
-          </a:xfrm>
-          <a:prstGeom prst="rect">
-            <a:avLst/>
-          </a:prstGeom>
-          <a:noFill/>
-          <a:ln/>
-        </p:spPr>
-        <p:txBody>
-          <a:bodyPr wrap="square" lIns="0" tIns="0" rIns="0" bIns="0" rtlCol="0" anchor="ctr"/>
-          <a:lstStyle/>
-          <a:p>
-            <a:pPr algn="r" indent="0" marL="0">
-              <a:buNone/>
-            </a:pPr>
-            <a:r>
-              <a:rPr lang="en-US" sz="900" dirty="0">
-                <a:solidFill>
-                  <a:srgbClr val="5D5D72"/>
-                </a:solidFill>
-                <a:latin typeface="Calibri" pitchFamily="34" charset="0"/>
-                <a:ea typeface="Calibri" pitchFamily="34" charset="-122"/>
-                <a:cs typeface="Calibri" pitchFamily="34" charset="-120"/>
-              </a:rPr>
-              <a:t>23</a:t>
-            </a:r>
-            <a:endParaRPr lang="en-US" sz="900" dirty="0"/>
+          <p:cNvPr id="14" name="cuinotes-footer-mark"/>
+          <p:cNvSpPr txBox="1"/>
+          <p:nvPr/>
+        </p:nvSpPr>
+        <p:spPr>
+          <a:xfrm>
+            <a:off x="9951720" y="6455664"/>
+            <a:ext cx="2011680" cy="292608"/>
+          </a:xfrm>
+          <a:prstGeom prst="rect">
+            <a:avLst/>
+          </a:prstGeom>
+          <a:noFill/>
+        </p:spPr>
+        <p:txBody>
+          <a:bodyPr wrap="none" lIns="0" rIns="0" tIns="0" bIns="0">
+            <a:spAutoFit/>
+          </a:bodyPr>
+          <a:lstStyle/>
+          <a:p>
+            <a:pPr algn="r"/>
+            <a:r>
+              <a:rPr sz="1000">
+                <a:solidFill>
+                  <a:srgbClr val="8A939B"/>
+                </a:solidFill>
+                <a:hlinkClick r:id="rId3"/>
+              </a:rPr>
+              <a:t>cuinotes.com</a:t>
+            </a:r>
+            <a:r>
+              <a:rPr sz="1000">
+                <a:solidFill>
+                  <a:srgbClr val="8A939B"/>
+                </a:solidFill>
+              </a:rPr>
+              <a:t>  ·  23</a:t>
+            </a:r>
           </a:p>
         </p:txBody>
       </p:sp>
@@ -12954,6 +12594,10 @@
             <a:prstDash val="solid"/>
           </a:ln>
         </p:spPr>
+        <p:txBody>
+          <a:bodyPr/>
+          <a:p/>
+        </p:txBody>
       </p:sp>
       <p:sp>
         <p:nvSpPr>
@@ -13035,79 +12679,44 @@
       </p:sp>
       <p:sp>
         <p:nvSpPr>
-          <p:cNvPr id="7" name="Text 5"/>
-          <p:cNvSpPr txBox="1"/>
-          <p:nvPr/>
-        </p:nvSpPr>
-        <p:spPr>
-          <a:xfrm>
-            <a:off x="640080" y="6446520"/>
-            <a:ext cx="8686800" cy="292608"/>
-          </a:xfrm>
-          <a:prstGeom prst="rect">
-            <a:avLst/>
-          </a:prstGeom>
-          <a:noFill/>
-          <a:ln/>
-        </p:spPr>
-        <p:txBody>
-          <a:bodyPr wrap="square" lIns="0" tIns="0" rIns="0" bIns="0" rtlCol="0" anchor="ctr"/>
-          <a:lstStyle/>
-          <a:p>
-            <a:pPr algn="l" indent="0" marL="0">
-              <a:buNone/>
-            </a:pPr>
-            <a:r>
-              <a:rPr lang="en-US" sz="900" dirty="0">
-                <a:solidFill>
-                  <a:srgbClr val="5D5D72"/>
-                </a:solidFill>
-                <a:latin typeface="Calibri" pitchFamily="34" charset="0"/>
-                <a:ea typeface="Calibri" pitchFamily="34" charset="-122"/>
-                <a:cs typeface="Calibri" pitchFamily="34" charset="-120"/>
-              </a:rPr>
-              <a:t>Usman Akram  •  COMSATS University Islamabad</a:t>
-            </a:r>
-            <a:endParaRPr lang="en-US" sz="900" dirty="0"/>
-          </a:p>
-        </p:txBody>
-      </p:sp>
-      <p:sp>
-        <p:nvSpPr>
-          <p:cNvPr id="8" name="Text 6"/>
-          <p:cNvSpPr txBox="1"/>
-          <p:nvPr/>
-        </p:nvSpPr>
-        <p:spPr>
-          <a:xfrm>
-            <a:off x="11155680" y="6446520"/>
-            <a:ext cx="457200" cy="292608"/>
-          </a:xfrm>
-          <a:prstGeom prst="rect">
-            <a:avLst/>
-          </a:prstGeom>
-          <a:noFill/>
-          <a:ln/>
-        </p:spPr>
-        <p:txBody>
-          <a:bodyPr wrap="square" lIns="0" tIns="0" rIns="0" bIns="0" rtlCol="0" anchor="ctr"/>
-          <a:lstStyle/>
-          <a:p>
-            <a:pPr algn="r" indent="0" marL="0">
-              <a:buNone/>
-            </a:pPr>
-            <a:r>
-              <a:rPr lang="en-US" sz="900" dirty="0">
-                <a:solidFill>
-                  <a:srgbClr val="5D5D72"/>
-                </a:solidFill>
-                <a:latin typeface="Calibri" pitchFamily="34" charset="0"/>
-                <a:ea typeface="Calibri" pitchFamily="34" charset="-122"/>
-                <a:cs typeface="Calibri" pitchFamily="34" charset="-120"/>
-              </a:rPr>
-              <a:t>24</a:t>
-            </a:r>
-            <a:endParaRPr lang="en-US" sz="900" dirty="0"/>
+          <p:cNvPr id="9" name="cuinotes-footer-mark"/>
+          <p:cNvSpPr txBox="1"/>
+          <p:nvPr/>
+        </p:nvSpPr>
+        <p:spPr>
+          <a:xfrm>
+            <a:off x="9951720" y="6455664"/>
+            <a:ext cx="2011680" cy="292608"/>
+          </a:xfrm>
+          <a:prstGeom prst="rect">
+            <a:avLst/>
+          </a:prstGeom>
+          <a:noFill/>
+        </p:spPr>
+        <p:txBody>
+          <a:bodyPr wrap="none" lIns="0" rIns="0" tIns="0" bIns="0">
+            <a:spAutoFit/>
+          </a:bodyPr>
+          <a:lstStyle/>
+          <a:p>
+            <a:pPr algn="r"/>
+            <a:r>
+              <a:rPr sz="1000">
+                <a:solidFill>
+                  <a:srgbClr val="8A939B"/>
+                </a:solidFill>
+                <a:hlinkClick r:id="rId3"/>
+              </a:rPr>
+              <a:t>cuinotes.com</a:t>
+            </a:r>
+            <a:r>
+              <a:rPr sz="1000">
+                <a:solidFill>
+                  <a:srgbClr val="8A939B"/>
+                </a:solidFill>
+              </a:rPr>
+              <a:t>  ·  24</a:t>
+            </a:r>
           </a:p>
         </p:txBody>
       </p:sp>
@@ -13240,6 +12849,10 @@
           </a:solidFill>
           <a:ln/>
         </p:spPr>
+        <p:txBody>
+          <a:bodyPr/>
+          <a:p/>
+        </p:txBody>
       </p:sp>
       <p:sp>
         <p:nvSpPr>
@@ -13338,6 +12951,10 @@
           </a:solidFill>
           <a:ln/>
         </p:spPr>
+        <p:txBody>
+          <a:bodyPr/>
+          <a:p/>
+        </p:txBody>
       </p:sp>
       <p:sp>
         <p:nvSpPr>
@@ -13436,6 +13053,10 @@
           </a:solidFill>
           <a:ln/>
         </p:spPr>
+        <p:txBody>
+          <a:bodyPr/>
+          <a:p/>
+        </p:txBody>
       </p:sp>
       <p:sp>
         <p:nvSpPr>
@@ -13534,6 +13155,10 @@
           </a:solidFill>
           <a:ln/>
         </p:spPr>
+        <p:txBody>
+          <a:bodyPr/>
+          <a:p/>
+        </p:txBody>
       </p:sp>
       <p:sp>
         <p:nvSpPr>
@@ -13632,6 +13257,10 @@
           </a:solidFill>
           <a:ln/>
         </p:spPr>
+        <p:txBody>
+          <a:bodyPr/>
+          <a:p/>
+        </p:txBody>
       </p:sp>
       <p:sp>
         <p:nvSpPr>
@@ -13730,6 +13359,10 @@
           </a:solidFill>
           <a:ln/>
         </p:spPr>
+        <p:txBody>
+          <a:bodyPr/>
+          <a:p/>
+        </p:txBody>
       </p:sp>
       <p:sp>
         <p:nvSpPr>
@@ -13811,79 +13444,44 @@
       </p:sp>
       <p:sp>
         <p:nvSpPr>
-          <p:cNvPr id="22" name="Text 20"/>
-          <p:cNvSpPr txBox="1"/>
-          <p:nvPr/>
-        </p:nvSpPr>
-        <p:spPr>
-          <a:xfrm>
-            <a:off x="640080" y="6446520"/>
-            <a:ext cx="8686800" cy="292608"/>
-          </a:xfrm>
-          <a:prstGeom prst="rect">
-            <a:avLst/>
-          </a:prstGeom>
-          <a:noFill/>
-          <a:ln/>
-        </p:spPr>
-        <p:txBody>
-          <a:bodyPr wrap="square" lIns="0" tIns="0" rIns="0" bIns="0" rtlCol="0" anchor="ctr"/>
-          <a:lstStyle/>
-          <a:p>
-            <a:pPr algn="l" indent="0" marL="0">
-              <a:buNone/>
-            </a:pPr>
-            <a:r>
-              <a:rPr lang="en-US" sz="900" dirty="0">
-                <a:solidFill>
-                  <a:srgbClr val="9AA3D8"/>
-                </a:solidFill>
-                <a:latin typeface="Calibri" pitchFamily="34" charset="0"/>
-                <a:ea typeface="Calibri" pitchFamily="34" charset="-122"/>
-                <a:cs typeface="Calibri" pitchFamily="34" charset="-120"/>
-              </a:rPr>
-              <a:t>Usman Akram  •  COMSATS University Islamabad</a:t>
-            </a:r>
-            <a:endParaRPr lang="en-US" sz="900" dirty="0"/>
-          </a:p>
-        </p:txBody>
-      </p:sp>
-      <p:sp>
-        <p:nvSpPr>
-          <p:cNvPr id="23" name="Text 21"/>
-          <p:cNvSpPr txBox="1"/>
-          <p:nvPr/>
-        </p:nvSpPr>
-        <p:spPr>
-          <a:xfrm>
-            <a:off x="11155680" y="6446520"/>
-            <a:ext cx="457200" cy="292608"/>
-          </a:xfrm>
-          <a:prstGeom prst="rect">
-            <a:avLst/>
-          </a:prstGeom>
-          <a:noFill/>
-          <a:ln/>
-        </p:spPr>
-        <p:txBody>
-          <a:bodyPr wrap="square" lIns="0" tIns="0" rIns="0" bIns="0" rtlCol="0" anchor="ctr"/>
-          <a:lstStyle/>
-          <a:p>
-            <a:pPr algn="r" indent="0" marL="0">
-              <a:buNone/>
-            </a:pPr>
-            <a:r>
-              <a:rPr lang="en-US" sz="900" dirty="0">
-                <a:solidFill>
-                  <a:srgbClr val="9AA3D8"/>
-                </a:solidFill>
-                <a:latin typeface="Calibri" pitchFamily="34" charset="0"/>
-                <a:ea typeface="Calibri" pitchFamily="34" charset="-122"/>
-                <a:cs typeface="Calibri" pitchFamily="34" charset="-120"/>
-              </a:rPr>
-              <a:t>25</a:t>
-            </a:r>
-            <a:endParaRPr lang="en-US" sz="900" dirty="0"/>
+          <p:cNvPr id="24" name="cuinotes-footer-mark"/>
+          <p:cNvSpPr txBox="1"/>
+          <p:nvPr/>
+        </p:nvSpPr>
+        <p:spPr>
+          <a:xfrm>
+            <a:off x="9951720" y="6455664"/>
+            <a:ext cx="2011680" cy="292608"/>
+          </a:xfrm>
+          <a:prstGeom prst="rect">
+            <a:avLst/>
+          </a:prstGeom>
+          <a:noFill/>
+        </p:spPr>
+        <p:txBody>
+          <a:bodyPr wrap="none" lIns="0" rIns="0" tIns="0" bIns="0">
+            <a:spAutoFit/>
+          </a:bodyPr>
+          <a:lstStyle/>
+          <a:p>
+            <a:pPr algn="r"/>
+            <a:r>
+              <a:rPr sz="1000">
+                <a:solidFill>
+                  <a:srgbClr val="8A939B"/>
+                </a:solidFill>
+                <a:hlinkClick r:id="rId3"/>
+              </a:rPr>
+              <a:t>cuinotes.com</a:t>
+            </a:r>
+            <a:r>
+              <a:rPr sz="1000">
+                <a:solidFill>
+                  <a:srgbClr val="8A939B"/>
+                </a:solidFill>
+              </a:rPr>
+              <a:t>  ·  25</a:t>
+            </a:r>
           </a:p>
         </p:txBody>
       </p:sp>
@@ -14016,6 +13614,10 @@
           </a:solidFill>
           <a:ln/>
         </p:spPr>
+        <p:txBody>
+          <a:bodyPr/>
+          <a:p/>
+        </p:txBody>
       </p:sp>
       <p:sp>
         <p:nvSpPr>
@@ -14114,6 +13716,10 @@
           </a:solidFill>
           <a:ln/>
         </p:spPr>
+        <p:txBody>
+          <a:bodyPr/>
+          <a:p/>
+        </p:txBody>
       </p:sp>
       <p:sp>
         <p:nvSpPr>
@@ -14212,6 +13818,10 @@
           </a:solidFill>
           <a:ln/>
         </p:spPr>
+        <p:txBody>
+          <a:bodyPr/>
+          <a:p/>
+        </p:txBody>
       </p:sp>
       <p:sp>
         <p:nvSpPr>
@@ -14293,79 +13903,44 @@
       </p:sp>
       <p:sp>
         <p:nvSpPr>
-          <p:cNvPr id="13" name="Text 11"/>
-          <p:cNvSpPr txBox="1"/>
-          <p:nvPr/>
-        </p:nvSpPr>
-        <p:spPr>
-          <a:xfrm>
-            <a:off x="640080" y="6446520"/>
-            <a:ext cx="8686800" cy="292608"/>
-          </a:xfrm>
-          <a:prstGeom prst="rect">
-            <a:avLst/>
-          </a:prstGeom>
-          <a:noFill/>
-          <a:ln/>
-        </p:spPr>
-        <p:txBody>
-          <a:bodyPr wrap="square" lIns="0" tIns="0" rIns="0" bIns="0" rtlCol="0" anchor="ctr"/>
-          <a:lstStyle/>
-          <a:p>
-            <a:pPr algn="l" indent="0" marL="0">
-              <a:buNone/>
-            </a:pPr>
-            <a:r>
-              <a:rPr lang="en-US" sz="900" dirty="0">
-                <a:solidFill>
-                  <a:srgbClr val="5D5D72"/>
-                </a:solidFill>
-                <a:latin typeface="Calibri" pitchFamily="34" charset="0"/>
-                <a:ea typeface="Calibri" pitchFamily="34" charset="-122"/>
-                <a:cs typeface="Calibri" pitchFamily="34" charset="-120"/>
-              </a:rPr>
-              <a:t>Usman Akram  •  COMSATS University Islamabad</a:t>
-            </a:r>
-            <a:endParaRPr lang="en-US" sz="900" dirty="0"/>
-          </a:p>
-        </p:txBody>
-      </p:sp>
-      <p:sp>
-        <p:nvSpPr>
-          <p:cNvPr id="14" name="Text 12"/>
-          <p:cNvSpPr txBox="1"/>
-          <p:nvPr/>
-        </p:nvSpPr>
-        <p:spPr>
-          <a:xfrm>
-            <a:off x="11155680" y="6446520"/>
-            <a:ext cx="457200" cy="292608"/>
-          </a:xfrm>
-          <a:prstGeom prst="rect">
-            <a:avLst/>
-          </a:prstGeom>
-          <a:noFill/>
-          <a:ln/>
-        </p:spPr>
-        <p:txBody>
-          <a:bodyPr wrap="square" lIns="0" tIns="0" rIns="0" bIns="0" rtlCol="0" anchor="ctr"/>
-          <a:lstStyle/>
-          <a:p>
-            <a:pPr algn="r" indent="0" marL="0">
-              <a:buNone/>
-            </a:pPr>
-            <a:r>
-              <a:rPr lang="en-US" sz="900" dirty="0">
-                <a:solidFill>
-                  <a:srgbClr val="5D5D72"/>
-                </a:solidFill>
-                <a:latin typeface="Calibri" pitchFamily="34" charset="0"/>
-                <a:ea typeface="Calibri" pitchFamily="34" charset="-122"/>
-                <a:cs typeface="Calibri" pitchFamily="34" charset="-120"/>
-              </a:rPr>
-              <a:t>3</a:t>
-            </a:r>
-            <a:endParaRPr lang="en-US" sz="900" dirty="0"/>
+          <p:cNvPr id="15" name="cuinotes-footer-mark"/>
+          <p:cNvSpPr txBox="1"/>
+          <p:nvPr/>
+        </p:nvSpPr>
+        <p:spPr>
+          <a:xfrm>
+            <a:off x="9951720" y="6455664"/>
+            <a:ext cx="2011680" cy="292608"/>
+          </a:xfrm>
+          <a:prstGeom prst="rect">
+            <a:avLst/>
+          </a:prstGeom>
+          <a:noFill/>
+        </p:spPr>
+        <p:txBody>
+          <a:bodyPr wrap="none" lIns="0" rIns="0" tIns="0" bIns="0">
+            <a:spAutoFit/>
+          </a:bodyPr>
+          <a:lstStyle/>
+          <a:p>
+            <a:pPr algn="r"/>
+            <a:r>
+              <a:rPr sz="1000">
+                <a:solidFill>
+                  <a:srgbClr val="8A939B"/>
+                </a:solidFill>
+                <a:hlinkClick r:id="rId3"/>
+              </a:rPr>
+              <a:t>cuinotes.com</a:t>
+            </a:r>
+            <a:r>
+              <a:rPr sz="1000">
+                <a:solidFill>
+                  <a:srgbClr val="8A939B"/>
+                </a:solidFill>
+              </a:rPr>
+              <a:t>  ·  3</a:t>
+            </a:r>
           </a:p>
         </p:txBody>
       </p:sp>
@@ -14500,6 +14075,10 @@
           </a:solidFill>
           <a:ln/>
         </p:spPr>
+        <p:txBody>
+          <a:bodyPr/>
+          <a:p/>
+        </p:txBody>
       </p:sp>
       <p:sp>
         <p:nvSpPr>
@@ -14580,6 +14159,10 @@
             <a:tailEnd type="triangle"/>
           </a:ln>
         </p:spPr>
+        <p:txBody>
+          <a:bodyPr/>
+          <a:p/>
+        </p:txBody>
       </p:sp>
       <p:sp>
         <p:nvSpPr>
@@ -14602,6 +14185,10 @@
           </a:solidFill>
           <a:ln/>
         </p:spPr>
+        <p:txBody>
+          <a:bodyPr/>
+          <a:p/>
+        </p:txBody>
       </p:sp>
       <p:sp>
         <p:nvSpPr>
@@ -14682,6 +14269,10 @@
             <a:tailEnd type="triangle"/>
           </a:ln>
         </p:spPr>
+        <p:txBody>
+          <a:bodyPr/>
+          <a:p/>
+        </p:txBody>
       </p:sp>
       <p:sp>
         <p:nvSpPr>
@@ -14704,6 +14295,10 @@
           </a:solidFill>
           <a:ln/>
         </p:spPr>
+        <p:txBody>
+          <a:bodyPr/>
+          <a:p/>
+        </p:txBody>
       </p:sp>
       <p:sp>
         <p:nvSpPr>
@@ -14784,6 +14379,10 @@
             <a:tailEnd type="triangle"/>
           </a:ln>
         </p:spPr>
+        <p:txBody>
+          <a:bodyPr/>
+          <a:p/>
+        </p:txBody>
       </p:sp>
       <p:sp>
         <p:nvSpPr>
@@ -14806,6 +14405,10 @@
           </a:solidFill>
           <a:ln/>
         </p:spPr>
+        <p:txBody>
+          <a:bodyPr/>
+          <a:p/>
+        </p:txBody>
       </p:sp>
       <p:sp>
         <p:nvSpPr>
@@ -14921,79 +14524,44 @@
       </p:sp>
       <p:sp>
         <p:nvSpPr>
-          <p:cNvPr id="16" name="Text 14"/>
-          <p:cNvSpPr txBox="1"/>
-          <p:nvPr/>
-        </p:nvSpPr>
-        <p:spPr>
-          <a:xfrm>
-            <a:off x="640080" y="6446520"/>
-            <a:ext cx="8686800" cy="292608"/>
-          </a:xfrm>
-          <a:prstGeom prst="rect">
-            <a:avLst/>
-          </a:prstGeom>
-          <a:noFill/>
-          <a:ln/>
-        </p:spPr>
-        <p:txBody>
-          <a:bodyPr wrap="square" lIns="0" tIns="0" rIns="0" bIns="0" rtlCol="0" anchor="ctr"/>
-          <a:lstStyle/>
-          <a:p>
-            <a:pPr algn="l" indent="0" marL="0">
-              <a:buNone/>
-            </a:pPr>
-            <a:r>
-              <a:rPr lang="en-US" sz="900" dirty="0">
-                <a:solidFill>
-                  <a:srgbClr val="5D5D72"/>
-                </a:solidFill>
-                <a:latin typeface="Calibri" pitchFamily="34" charset="0"/>
-                <a:ea typeface="Calibri" pitchFamily="34" charset="-122"/>
-                <a:cs typeface="Calibri" pitchFamily="34" charset="-120"/>
-              </a:rPr>
-              <a:t>Usman Akram  •  COMSATS University Islamabad</a:t>
-            </a:r>
-            <a:endParaRPr lang="en-US" sz="900" dirty="0"/>
-          </a:p>
-        </p:txBody>
-      </p:sp>
-      <p:sp>
-        <p:nvSpPr>
-          <p:cNvPr id="17" name="Text 15"/>
-          <p:cNvSpPr txBox="1"/>
-          <p:nvPr/>
-        </p:nvSpPr>
-        <p:spPr>
-          <a:xfrm>
-            <a:off x="11155680" y="6446520"/>
-            <a:ext cx="457200" cy="292608"/>
-          </a:xfrm>
-          <a:prstGeom prst="rect">
-            <a:avLst/>
-          </a:prstGeom>
-          <a:noFill/>
-          <a:ln/>
-        </p:spPr>
-        <p:txBody>
-          <a:bodyPr wrap="square" lIns="0" tIns="0" rIns="0" bIns="0" rtlCol="0" anchor="ctr"/>
-          <a:lstStyle/>
-          <a:p>
-            <a:pPr algn="r" indent="0" marL="0">
-              <a:buNone/>
-            </a:pPr>
-            <a:r>
-              <a:rPr lang="en-US" sz="900" dirty="0">
-                <a:solidFill>
-                  <a:srgbClr val="5D5D72"/>
-                </a:solidFill>
-                <a:latin typeface="Calibri" pitchFamily="34" charset="0"/>
-                <a:ea typeface="Calibri" pitchFamily="34" charset="-122"/>
-                <a:cs typeface="Calibri" pitchFamily="34" charset="-120"/>
-              </a:rPr>
-              <a:t>4</a:t>
-            </a:r>
-            <a:endParaRPr lang="en-US" sz="900" dirty="0"/>
+          <p:cNvPr id="18" name="cuinotes-footer-mark"/>
+          <p:cNvSpPr txBox="1"/>
+          <p:nvPr/>
+        </p:nvSpPr>
+        <p:spPr>
+          <a:xfrm>
+            <a:off x="9951720" y="6455664"/>
+            <a:ext cx="2011680" cy="292608"/>
+          </a:xfrm>
+          <a:prstGeom prst="rect">
+            <a:avLst/>
+          </a:prstGeom>
+          <a:noFill/>
+        </p:spPr>
+        <p:txBody>
+          <a:bodyPr wrap="none" lIns="0" rIns="0" tIns="0" bIns="0">
+            <a:spAutoFit/>
+          </a:bodyPr>
+          <a:lstStyle/>
+          <a:p>
+            <a:pPr algn="r"/>
+            <a:r>
+              <a:rPr sz="1000">
+                <a:solidFill>
+                  <a:srgbClr val="8A939B"/>
+                </a:solidFill>
+                <a:hlinkClick r:id="rId3"/>
+              </a:rPr>
+              <a:t>cuinotes.com</a:t>
+            </a:r>
+            <a:r>
+              <a:rPr sz="1000">
+                <a:solidFill>
+                  <a:srgbClr val="8A939B"/>
+                </a:solidFill>
+              </a:rPr>
+              <a:t>  ·  4</a:t>
+            </a:r>
           </a:p>
         </p:txBody>
       </p:sp>
@@ -15126,6 +14694,10 @@
           </a:solidFill>
           <a:ln/>
         </p:spPr>
+        <p:txBody>
+          <a:bodyPr/>
+          <a:p/>
+        </p:txBody>
       </p:sp>
       <p:sp>
         <p:nvSpPr>
@@ -15224,6 +14796,10 @@
           </a:solidFill>
           <a:ln/>
         </p:spPr>
+        <p:txBody>
+          <a:bodyPr/>
+          <a:p/>
+        </p:txBody>
       </p:sp>
       <p:sp>
         <p:nvSpPr>
@@ -15322,6 +14898,10 @@
           </a:solidFill>
           <a:ln/>
         </p:spPr>
+        <p:txBody>
+          <a:bodyPr/>
+          <a:p/>
+        </p:txBody>
       </p:sp>
       <p:sp>
         <p:nvSpPr>
@@ -15403,79 +14983,44 @@
       </p:sp>
       <p:sp>
         <p:nvSpPr>
-          <p:cNvPr id="13" name="Text 11"/>
-          <p:cNvSpPr txBox="1"/>
-          <p:nvPr/>
-        </p:nvSpPr>
-        <p:spPr>
-          <a:xfrm>
-            <a:off x="640080" y="6446520"/>
-            <a:ext cx="8686800" cy="292608"/>
-          </a:xfrm>
-          <a:prstGeom prst="rect">
-            <a:avLst/>
-          </a:prstGeom>
-          <a:noFill/>
-          <a:ln/>
-        </p:spPr>
-        <p:txBody>
-          <a:bodyPr wrap="square" lIns="0" tIns="0" rIns="0" bIns="0" rtlCol="0" anchor="ctr"/>
-          <a:lstStyle/>
-          <a:p>
-            <a:pPr algn="l" indent="0" marL="0">
-              <a:buNone/>
-            </a:pPr>
-            <a:r>
-              <a:rPr lang="en-US" sz="900" dirty="0">
-                <a:solidFill>
-                  <a:srgbClr val="5D5D72"/>
-                </a:solidFill>
-                <a:latin typeface="Calibri" pitchFamily="34" charset="0"/>
-                <a:ea typeface="Calibri" pitchFamily="34" charset="-122"/>
-                <a:cs typeface="Calibri" pitchFamily="34" charset="-120"/>
-              </a:rPr>
-              <a:t>Usman Akram  •  COMSATS University Islamabad</a:t>
-            </a:r>
-            <a:endParaRPr lang="en-US" sz="900" dirty="0"/>
-          </a:p>
-        </p:txBody>
-      </p:sp>
-      <p:sp>
-        <p:nvSpPr>
-          <p:cNvPr id="14" name="Text 12"/>
-          <p:cNvSpPr txBox="1"/>
-          <p:nvPr/>
-        </p:nvSpPr>
-        <p:spPr>
-          <a:xfrm>
-            <a:off x="11155680" y="6446520"/>
-            <a:ext cx="457200" cy="292608"/>
-          </a:xfrm>
-          <a:prstGeom prst="rect">
-            <a:avLst/>
-          </a:prstGeom>
-          <a:noFill/>
-          <a:ln/>
-        </p:spPr>
-        <p:txBody>
-          <a:bodyPr wrap="square" lIns="0" tIns="0" rIns="0" bIns="0" rtlCol="0" anchor="ctr"/>
-          <a:lstStyle/>
-          <a:p>
-            <a:pPr algn="r" indent="0" marL="0">
-              <a:buNone/>
-            </a:pPr>
-            <a:r>
-              <a:rPr lang="en-US" sz="900" dirty="0">
-                <a:solidFill>
-                  <a:srgbClr val="5D5D72"/>
-                </a:solidFill>
-                <a:latin typeface="Calibri" pitchFamily="34" charset="0"/>
-                <a:ea typeface="Calibri" pitchFamily="34" charset="-122"/>
-                <a:cs typeface="Calibri" pitchFamily="34" charset="-120"/>
-              </a:rPr>
-              <a:t>5</a:t>
-            </a:r>
-            <a:endParaRPr lang="en-US" sz="900" dirty="0"/>
+          <p:cNvPr id="15" name="cuinotes-footer-mark"/>
+          <p:cNvSpPr txBox="1"/>
+          <p:nvPr/>
+        </p:nvSpPr>
+        <p:spPr>
+          <a:xfrm>
+            <a:off x="9951720" y="6455664"/>
+            <a:ext cx="2011680" cy="292608"/>
+          </a:xfrm>
+          <a:prstGeom prst="rect">
+            <a:avLst/>
+          </a:prstGeom>
+          <a:noFill/>
+        </p:spPr>
+        <p:txBody>
+          <a:bodyPr wrap="none" lIns="0" rIns="0" tIns="0" bIns="0">
+            <a:spAutoFit/>
+          </a:bodyPr>
+          <a:lstStyle/>
+          <a:p>
+            <a:pPr algn="r"/>
+            <a:r>
+              <a:rPr sz="1000">
+                <a:solidFill>
+                  <a:srgbClr val="8A939B"/>
+                </a:solidFill>
+                <a:hlinkClick r:id="rId3"/>
+              </a:rPr>
+              <a:t>cuinotes.com</a:t>
+            </a:r>
+            <a:r>
+              <a:rPr sz="1000">
+                <a:solidFill>
+                  <a:srgbClr val="8A939B"/>
+                </a:solidFill>
+              </a:rPr>
+              <a:t>  ·  5</a:t>
+            </a:r>
           </a:p>
         </p:txBody>
       </p:sp>
@@ -15608,6 +15153,10 @@
           </a:solidFill>
           <a:ln/>
         </p:spPr>
+        <p:txBody>
+          <a:bodyPr/>
+          <a:p/>
+        </p:txBody>
       </p:sp>
       <p:sp>
         <p:nvSpPr>
@@ -15706,6 +15255,10 @@
           </a:solidFill>
           <a:ln/>
         </p:spPr>
+        <p:txBody>
+          <a:bodyPr/>
+          <a:p/>
+        </p:txBody>
       </p:sp>
       <p:sp>
         <p:nvSpPr>
@@ -15804,6 +15357,10 @@
           </a:solidFill>
           <a:ln/>
         </p:spPr>
+        <p:txBody>
+          <a:bodyPr/>
+          <a:p/>
+        </p:txBody>
       </p:sp>
       <p:sp>
         <p:nvSpPr>
@@ -15885,79 +15442,44 @@
       </p:sp>
       <p:sp>
         <p:nvSpPr>
-          <p:cNvPr id="13" name="Text 11"/>
-          <p:cNvSpPr txBox="1"/>
-          <p:nvPr/>
-        </p:nvSpPr>
-        <p:spPr>
-          <a:xfrm>
-            <a:off x="640080" y="6446520"/>
-            <a:ext cx="8686800" cy="292608"/>
-          </a:xfrm>
-          <a:prstGeom prst="rect">
-            <a:avLst/>
-          </a:prstGeom>
-          <a:noFill/>
-          <a:ln/>
-        </p:spPr>
-        <p:txBody>
-          <a:bodyPr wrap="square" lIns="0" tIns="0" rIns="0" bIns="0" rtlCol="0" anchor="ctr"/>
-          <a:lstStyle/>
-          <a:p>
-            <a:pPr algn="l" indent="0" marL="0">
-              <a:buNone/>
-            </a:pPr>
-            <a:r>
-              <a:rPr lang="en-US" sz="900" dirty="0">
-                <a:solidFill>
-                  <a:srgbClr val="5D5D72"/>
-                </a:solidFill>
-                <a:latin typeface="Calibri" pitchFamily="34" charset="0"/>
-                <a:ea typeface="Calibri" pitchFamily="34" charset="-122"/>
-                <a:cs typeface="Calibri" pitchFamily="34" charset="-120"/>
-              </a:rPr>
-              <a:t>Usman Akram  •  COMSATS University Islamabad</a:t>
-            </a:r>
-            <a:endParaRPr lang="en-US" sz="900" dirty="0"/>
-          </a:p>
-        </p:txBody>
-      </p:sp>
-      <p:sp>
-        <p:nvSpPr>
-          <p:cNvPr id="14" name="Text 12"/>
-          <p:cNvSpPr txBox="1"/>
-          <p:nvPr/>
-        </p:nvSpPr>
-        <p:spPr>
-          <a:xfrm>
-            <a:off x="11155680" y="6446520"/>
-            <a:ext cx="457200" cy="292608"/>
-          </a:xfrm>
-          <a:prstGeom prst="rect">
-            <a:avLst/>
-          </a:prstGeom>
-          <a:noFill/>
-          <a:ln/>
-        </p:spPr>
-        <p:txBody>
-          <a:bodyPr wrap="square" lIns="0" tIns="0" rIns="0" bIns="0" rtlCol="0" anchor="ctr"/>
-          <a:lstStyle/>
-          <a:p>
-            <a:pPr algn="r" indent="0" marL="0">
-              <a:buNone/>
-            </a:pPr>
-            <a:r>
-              <a:rPr lang="en-US" sz="900" dirty="0">
-                <a:solidFill>
-                  <a:srgbClr val="5D5D72"/>
-                </a:solidFill>
-                <a:latin typeface="Calibri" pitchFamily="34" charset="0"/>
-                <a:ea typeface="Calibri" pitchFamily="34" charset="-122"/>
-                <a:cs typeface="Calibri" pitchFamily="34" charset="-120"/>
-              </a:rPr>
-              <a:t>6</a:t>
-            </a:r>
-            <a:endParaRPr lang="en-US" sz="900" dirty="0"/>
+          <p:cNvPr id="15" name="cuinotes-footer-mark"/>
+          <p:cNvSpPr txBox="1"/>
+          <p:nvPr/>
+        </p:nvSpPr>
+        <p:spPr>
+          <a:xfrm>
+            <a:off x="9951720" y="6455664"/>
+            <a:ext cx="2011680" cy="292608"/>
+          </a:xfrm>
+          <a:prstGeom prst="rect">
+            <a:avLst/>
+          </a:prstGeom>
+          <a:noFill/>
+        </p:spPr>
+        <p:txBody>
+          <a:bodyPr wrap="none" lIns="0" rIns="0" tIns="0" bIns="0">
+            <a:spAutoFit/>
+          </a:bodyPr>
+          <a:lstStyle/>
+          <a:p>
+            <a:pPr algn="r"/>
+            <a:r>
+              <a:rPr sz="1000">
+                <a:solidFill>
+                  <a:srgbClr val="8A939B"/>
+                </a:solidFill>
+                <a:hlinkClick r:id="rId3"/>
+              </a:rPr>
+              <a:t>cuinotes.com</a:t>
+            </a:r>
+            <a:r>
+              <a:rPr sz="1000">
+                <a:solidFill>
+                  <a:srgbClr val="8A939B"/>
+                </a:solidFill>
+              </a:rPr>
+              <a:t>  ·  6</a:t>
+            </a:r>
           </a:p>
         </p:txBody>
       </p:sp>
@@ -16092,6 +15614,10 @@
           </a:solidFill>
           <a:ln/>
         </p:spPr>
+        <p:txBody>
+          <a:bodyPr/>
+          <a:p/>
+        </p:txBody>
       </p:sp>
       <p:sp>
         <p:nvSpPr>
@@ -16325,79 +15851,44 @@
       </p:sp>
       <p:sp>
         <p:nvSpPr>
-          <p:cNvPr id="7" name="Text 5"/>
-          <p:cNvSpPr txBox="1"/>
-          <p:nvPr/>
-        </p:nvSpPr>
-        <p:spPr>
-          <a:xfrm>
-            <a:off x="640080" y="6446520"/>
-            <a:ext cx="8686800" cy="292608"/>
-          </a:xfrm>
-          <a:prstGeom prst="rect">
-            <a:avLst/>
-          </a:prstGeom>
-          <a:noFill/>
-          <a:ln/>
-        </p:spPr>
-        <p:txBody>
-          <a:bodyPr wrap="square" lIns="0" tIns="0" rIns="0" bIns="0" rtlCol="0" anchor="ctr"/>
-          <a:lstStyle/>
-          <a:p>
-            <a:pPr algn="l" indent="0" marL="0">
-              <a:buNone/>
-            </a:pPr>
-            <a:r>
-              <a:rPr lang="en-US" sz="900" dirty="0">
-                <a:solidFill>
-                  <a:srgbClr val="5D5D72"/>
-                </a:solidFill>
-                <a:latin typeface="Calibri" pitchFamily="34" charset="0"/>
-                <a:ea typeface="Calibri" pitchFamily="34" charset="-122"/>
-                <a:cs typeface="Calibri" pitchFamily="34" charset="-120"/>
-              </a:rPr>
-              <a:t>Usman Akram  •  COMSATS University Islamabad</a:t>
-            </a:r>
-            <a:endParaRPr lang="en-US" sz="900" dirty="0"/>
-          </a:p>
-        </p:txBody>
-      </p:sp>
-      <p:sp>
-        <p:nvSpPr>
-          <p:cNvPr id="8" name="Text 6"/>
-          <p:cNvSpPr txBox="1"/>
-          <p:nvPr/>
-        </p:nvSpPr>
-        <p:spPr>
-          <a:xfrm>
-            <a:off x="11155680" y="6446520"/>
-            <a:ext cx="457200" cy="292608"/>
-          </a:xfrm>
-          <a:prstGeom prst="rect">
-            <a:avLst/>
-          </a:prstGeom>
-          <a:noFill/>
-          <a:ln/>
-        </p:spPr>
-        <p:txBody>
-          <a:bodyPr wrap="square" lIns="0" tIns="0" rIns="0" bIns="0" rtlCol="0" anchor="ctr"/>
-          <a:lstStyle/>
-          <a:p>
-            <a:pPr algn="r" indent="0" marL="0">
-              <a:buNone/>
-            </a:pPr>
-            <a:r>
-              <a:rPr lang="en-US" sz="900" dirty="0">
-                <a:solidFill>
-                  <a:srgbClr val="5D5D72"/>
-                </a:solidFill>
-                <a:latin typeface="Calibri" pitchFamily="34" charset="0"/>
-                <a:ea typeface="Calibri" pitchFamily="34" charset="-122"/>
-                <a:cs typeface="Calibri" pitchFamily="34" charset="-120"/>
-              </a:rPr>
-              <a:t>7</a:t>
-            </a:r>
-            <a:endParaRPr lang="en-US" sz="900" dirty="0"/>
+          <p:cNvPr id="9" name="cuinotes-footer-mark"/>
+          <p:cNvSpPr txBox="1"/>
+          <p:nvPr/>
+        </p:nvSpPr>
+        <p:spPr>
+          <a:xfrm>
+            <a:off x="9951720" y="6455664"/>
+            <a:ext cx="2011680" cy="292608"/>
+          </a:xfrm>
+          <a:prstGeom prst="rect">
+            <a:avLst/>
+          </a:prstGeom>
+          <a:noFill/>
+        </p:spPr>
+        <p:txBody>
+          <a:bodyPr wrap="none" lIns="0" rIns="0" tIns="0" bIns="0">
+            <a:spAutoFit/>
+          </a:bodyPr>
+          <a:lstStyle/>
+          <a:p>
+            <a:pPr algn="r"/>
+            <a:r>
+              <a:rPr sz="1000">
+                <a:solidFill>
+                  <a:srgbClr val="8A939B"/>
+                </a:solidFill>
+                <a:hlinkClick r:id="rId3"/>
+              </a:rPr>
+              <a:t>cuinotes.com</a:t>
+            </a:r>
+            <a:r>
+              <a:rPr sz="1000">
+                <a:solidFill>
+                  <a:srgbClr val="8A939B"/>
+                </a:solidFill>
+              </a:rPr>
+              <a:t>  ·  7</a:t>
+            </a:r>
           </a:p>
         </p:txBody>
       </p:sp>
@@ -16537,6 +16028,10 @@
             <a:prstDash val="solid"/>
           </a:ln>
         </p:spPr>
+        <p:txBody>
+          <a:bodyPr/>
+          <a:p/>
+        </p:txBody>
       </p:sp>
       <p:sp>
         <p:nvSpPr>
@@ -16618,79 +16113,44 @@
       </p:sp>
       <p:sp>
         <p:nvSpPr>
-          <p:cNvPr id="7" name="Text 5"/>
-          <p:cNvSpPr txBox="1"/>
-          <p:nvPr/>
-        </p:nvSpPr>
-        <p:spPr>
-          <a:xfrm>
-            <a:off x="640080" y="6446520"/>
-            <a:ext cx="8686800" cy="292608"/>
-          </a:xfrm>
-          <a:prstGeom prst="rect">
-            <a:avLst/>
-          </a:prstGeom>
-          <a:noFill/>
-          <a:ln/>
-        </p:spPr>
-        <p:txBody>
-          <a:bodyPr wrap="square" lIns="0" tIns="0" rIns="0" bIns="0" rtlCol="0" anchor="ctr"/>
-          <a:lstStyle/>
-          <a:p>
-            <a:pPr algn="l" indent="0" marL="0">
-              <a:buNone/>
-            </a:pPr>
-            <a:r>
-              <a:rPr lang="en-US" sz="900" dirty="0">
-                <a:solidFill>
-                  <a:srgbClr val="5D5D72"/>
-                </a:solidFill>
-                <a:latin typeface="Calibri" pitchFamily="34" charset="0"/>
-                <a:ea typeface="Calibri" pitchFamily="34" charset="-122"/>
-                <a:cs typeface="Calibri" pitchFamily="34" charset="-120"/>
-              </a:rPr>
-              <a:t>Usman Akram  •  COMSATS University Islamabad</a:t>
-            </a:r>
-            <a:endParaRPr lang="en-US" sz="900" dirty="0"/>
-          </a:p>
-        </p:txBody>
-      </p:sp>
-      <p:sp>
-        <p:nvSpPr>
-          <p:cNvPr id="8" name="Text 6"/>
-          <p:cNvSpPr txBox="1"/>
-          <p:nvPr/>
-        </p:nvSpPr>
-        <p:spPr>
-          <a:xfrm>
-            <a:off x="11155680" y="6446520"/>
-            <a:ext cx="457200" cy="292608"/>
-          </a:xfrm>
-          <a:prstGeom prst="rect">
-            <a:avLst/>
-          </a:prstGeom>
-          <a:noFill/>
-          <a:ln/>
-        </p:spPr>
-        <p:txBody>
-          <a:bodyPr wrap="square" lIns="0" tIns="0" rIns="0" bIns="0" rtlCol="0" anchor="ctr"/>
-          <a:lstStyle/>
-          <a:p>
-            <a:pPr algn="r" indent="0" marL="0">
-              <a:buNone/>
-            </a:pPr>
-            <a:r>
-              <a:rPr lang="en-US" sz="900" dirty="0">
-                <a:solidFill>
-                  <a:srgbClr val="5D5D72"/>
-                </a:solidFill>
-                <a:latin typeface="Calibri" pitchFamily="34" charset="0"/>
-                <a:ea typeface="Calibri" pitchFamily="34" charset="-122"/>
-                <a:cs typeface="Calibri" pitchFamily="34" charset="-120"/>
-              </a:rPr>
-              <a:t>8</a:t>
-            </a:r>
-            <a:endParaRPr lang="en-US" sz="900" dirty="0"/>
+          <p:cNvPr id="9" name="cuinotes-footer-mark"/>
+          <p:cNvSpPr txBox="1"/>
+          <p:nvPr/>
+        </p:nvSpPr>
+        <p:spPr>
+          <a:xfrm>
+            <a:off x="9951720" y="6455664"/>
+            <a:ext cx="2011680" cy="292608"/>
+          </a:xfrm>
+          <a:prstGeom prst="rect">
+            <a:avLst/>
+          </a:prstGeom>
+          <a:noFill/>
+        </p:spPr>
+        <p:txBody>
+          <a:bodyPr wrap="none" lIns="0" rIns="0" tIns="0" bIns="0">
+            <a:spAutoFit/>
+          </a:bodyPr>
+          <a:lstStyle/>
+          <a:p>
+            <a:pPr algn="r"/>
+            <a:r>
+              <a:rPr sz="1000">
+                <a:solidFill>
+                  <a:srgbClr val="8A939B"/>
+                </a:solidFill>
+                <a:hlinkClick r:id="rId3"/>
+              </a:rPr>
+              <a:t>cuinotes.com</a:t>
+            </a:r>
+            <a:r>
+              <a:rPr sz="1000">
+                <a:solidFill>
+                  <a:srgbClr val="8A939B"/>
+                </a:solidFill>
+              </a:rPr>
+              <a:t>  ·  8</a:t>
+            </a:r>
           </a:p>
         </p:txBody>
       </p:sp>
@@ -16825,6 +16285,10 @@
           </a:solidFill>
           <a:ln/>
         </p:spPr>
+        <p:txBody>
+          <a:bodyPr/>
+          <a:p/>
+        </p:txBody>
       </p:sp>
       <p:sp>
         <p:nvSpPr>
@@ -16905,6 +16369,10 @@
             <a:tailEnd type="triangle"/>
           </a:ln>
         </p:spPr>
+        <p:txBody>
+          <a:bodyPr/>
+          <a:p/>
+        </p:txBody>
       </p:sp>
       <p:sp>
         <p:nvSpPr>
@@ -16927,6 +16395,10 @@
           </a:solidFill>
           <a:ln/>
         </p:spPr>
+        <p:txBody>
+          <a:bodyPr/>
+          <a:p/>
+        </p:txBody>
       </p:sp>
       <p:sp>
         <p:nvSpPr>
@@ -17024,6 +16496,10 @@
             <a:tailEnd type="triangle"/>
           </a:ln>
         </p:spPr>
+        <p:txBody>
+          <a:bodyPr/>
+          <a:p/>
+        </p:txBody>
       </p:sp>
       <p:sp>
         <p:nvSpPr>
@@ -17046,6 +16522,10 @@
           </a:solidFill>
           <a:ln/>
         </p:spPr>
+        <p:txBody>
+          <a:bodyPr/>
+          <a:p/>
+        </p:txBody>
       </p:sp>
       <p:sp>
         <p:nvSpPr>
@@ -17143,6 +16623,10 @@
             <a:tailEnd type="triangle"/>
           </a:ln>
         </p:spPr>
+        <p:txBody>
+          <a:bodyPr/>
+          <a:p/>
+        </p:txBody>
       </p:sp>
       <p:sp>
         <p:nvSpPr>
@@ -17165,6 +16649,10 @@
           </a:solidFill>
           <a:ln/>
         </p:spPr>
+        <p:txBody>
+          <a:bodyPr/>
+          <a:p/>
+        </p:txBody>
       </p:sp>
       <p:sp>
         <p:nvSpPr>
@@ -17280,79 +16768,44 @@
       </p:sp>
       <p:sp>
         <p:nvSpPr>
-          <p:cNvPr id="16" name="Text 14"/>
-          <p:cNvSpPr txBox="1"/>
-          <p:nvPr/>
-        </p:nvSpPr>
-        <p:spPr>
-          <a:xfrm>
-            <a:off x="640080" y="6446520"/>
-            <a:ext cx="8686800" cy="292608"/>
-          </a:xfrm>
-          <a:prstGeom prst="rect">
-            <a:avLst/>
-          </a:prstGeom>
-          <a:noFill/>
-          <a:ln/>
-        </p:spPr>
-        <p:txBody>
-          <a:bodyPr wrap="square" lIns="0" tIns="0" rIns="0" bIns="0" rtlCol="0" anchor="ctr"/>
-          <a:lstStyle/>
-          <a:p>
-            <a:pPr algn="l" indent="0" marL="0">
-              <a:buNone/>
-            </a:pPr>
-            <a:r>
-              <a:rPr lang="en-US" sz="900" dirty="0">
-                <a:solidFill>
-                  <a:srgbClr val="5D5D72"/>
-                </a:solidFill>
-                <a:latin typeface="Calibri" pitchFamily="34" charset="0"/>
-                <a:ea typeface="Calibri" pitchFamily="34" charset="-122"/>
-                <a:cs typeface="Calibri" pitchFamily="34" charset="-120"/>
-              </a:rPr>
-              <a:t>Usman Akram  •  COMSATS University Islamabad</a:t>
-            </a:r>
-            <a:endParaRPr lang="en-US" sz="900" dirty="0"/>
-          </a:p>
-        </p:txBody>
-      </p:sp>
-      <p:sp>
-        <p:nvSpPr>
-          <p:cNvPr id="17" name="Text 15"/>
-          <p:cNvSpPr txBox="1"/>
-          <p:nvPr/>
-        </p:nvSpPr>
-        <p:spPr>
-          <a:xfrm>
-            <a:off x="11155680" y="6446520"/>
-            <a:ext cx="457200" cy="292608"/>
-          </a:xfrm>
-          <a:prstGeom prst="rect">
-            <a:avLst/>
-          </a:prstGeom>
-          <a:noFill/>
-          <a:ln/>
-        </p:spPr>
-        <p:txBody>
-          <a:bodyPr wrap="square" lIns="0" tIns="0" rIns="0" bIns="0" rtlCol="0" anchor="ctr"/>
-          <a:lstStyle/>
-          <a:p>
-            <a:pPr algn="r" indent="0" marL="0">
-              <a:buNone/>
-            </a:pPr>
-            <a:r>
-              <a:rPr lang="en-US" sz="900" dirty="0">
-                <a:solidFill>
-                  <a:srgbClr val="5D5D72"/>
-                </a:solidFill>
-                <a:latin typeface="Calibri" pitchFamily="34" charset="0"/>
-                <a:ea typeface="Calibri" pitchFamily="34" charset="-122"/>
-                <a:cs typeface="Calibri" pitchFamily="34" charset="-120"/>
-              </a:rPr>
-              <a:t>9</a:t>
-            </a:r>
-            <a:endParaRPr lang="en-US" sz="900" dirty="0"/>
+          <p:cNvPr id="18" name="cuinotes-footer-mark"/>
+          <p:cNvSpPr txBox="1"/>
+          <p:nvPr/>
+        </p:nvSpPr>
+        <p:spPr>
+          <a:xfrm>
+            <a:off x="9951720" y="6455664"/>
+            <a:ext cx="2011680" cy="292608"/>
+          </a:xfrm>
+          <a:prstGeom prst="rect">
+            <a:avLst/>
+          </a:prstGeom>
+          <a:noFill/>
+        </p:spPr>
+        <p:txBody>
+          <a:bodyPr wrap="none" lIns="0" rIns="0" tIns="0" bIns="0">
+            <a:spAutoFit/>
+          </a:bodyPr>
+          <a:lstStyle/>
+          <a:p>
+            <a:pPr algn="r"/>
+            <a:r>
+              <a:rPr sz="1000">
+                <a:solidFill>
+                  <a:srgbClr val="8A939B"/>
+                </a:solidFill>
+                <a:hlinkClick r:id="rId3"/>
+              </a:rPr>
+              <a:t>cuinotes.com</a:t>
+            </a:r>
+            <a:r>
+              <a:rPr sz="1000">
+                <a:solidFill>
+                  <a:srgbClr val="8A939B"/>
+                </a:solidFill>
+              </a:rPr>
+              <a:t>  ·  9</a:t>
+            </a:r>
           </a:p>
         </p:txBody>
       </p:sp>

--- a/slides/CSC336-Lecture-20-Cookies-and-Sessions.pptx
+++ b/slides/CSC336-Lecture-20-Cookies-and-Sessions.pptx
@@ -4371,9 +4371,13 @@
             </a:avLst>
           </a:prstGeom>
           <a:solidFill>
-            <a:srgbClr val="1E1E4C"/>
+            <a:srgbClr val="F7F8F9"/>
           </a:solidFill>
-          <a:ln/>
+          <a:ln w="9525">
+            <a:solidFill>
+              <a:srgbClr val="D0D5DD"/>
+            </a:solidFill>
+          </a:ln>
         </p:spPr>
         <p:txBody>
           <a:bodyPr/>
@@ -4410,7 +4414,7 @@
             <a:r>
               <a:rPr lang="en-US" sz="1400" dirty="0">
                 <a:solidFill>
-                  <a:srgbClr val="C9D3F5"/>
+                  <a:srgbClr val="1F2429"/>
                 </a:solidFill>
                 <a:latin typeface="Courier New" pitchFamily="34" charset="0"/>
                 <a:ea typeface="Courier New" pitchFamily="34" charset="-122"/>
@@ -4430,7 +4434,7 @@
             <a:r>
               <a:rPr lang="en-US" sz="1400" dirty="0">
                 <a:solidFill>
-                  <a:srgbClr val="C9D3F5"/>
+                  <a:srgbClr val="1F2429"/>
                 </a:solidFill>
                 <a:latin typeface="Courier New" pitchFamily="34" charset="0"/>
                 <a:ea typeface="Courier New" pitchFamily="34" charset="-122"/>
@@ -4450,7 +4454,7 @@
             <a:r>
               <a:rPr lang="en-US" sz="1400" dirty="0">
                 <a:solidFill>
-                  <a:srgbClr val="C9D3F5"/>
+                  <a:srgbClr val="1F2429"/>
                 </a:solidFill>
                 <a:latin typeface="Courier New" pitchFamily="34" charset="0"/>
                 <a:ea typeface="Courier New" pitchFamily="34" charset="-122"/>
@@ -4470,7 +4474,7 @@
             <a:r>
               <a:rPr lang="en-US" sz="1400" dirty="0">
                 <a:solidFill>
-                  <a:srgbClr val="C9D3F5"/>
+                  <a:srgbClr val="1F2429"/>
                 </a:solidFill>
                 <a:latin typeface="Courier New" pitchFamily="34" charset="0"/>
                 <a:ea typeface="Courier New" pitchFamily="34" charset="-122"/>
@@ -4490,7 +4494,7 @@
             <a:r>
               <a:rPr lang="en-US" sz="1400" dirty="0">
                 <a:solidFill>
-                  <a:srgbClr val="C9D3F5"/>
+                  <a:srgbClr val="1F2429"/>
                 </a:solidFill>
                 <a:latin typeface="Courier New" pitchFamily="34" charset="0"/>
                 <a:ea typeface="Courier New" pitchFamily="34" charset="-122"/>
@@ -4510,7 +4514,7 @@
             <a:r>
               <a:rPr lang="en-US" sz="1400" dirty="0">
                 <a:solidFill>
-                  <a:srgbClr val="C9D3F5"/>
+                  <a:srgbClr val="1F2429"/>
                 </a:solidFill>
                 <a:latin typeface="Courier New" pitchFamily="34" charset="0"/>
                 <a:ea typeface="Courier New" pitchFamily="34" charset="-122"/>
@@ -4530,7 +4534,7 @@
             <a:r>
               <a:rPr lang="en-US" sz="1400" dirty="0">
                 <a:solidFill>
-                  <a:srgbClr val="C9D3F5"/>
+                  <a:srgbClr val="1F2429"/>
                 </a:solidFill>
                 <a:latin typeface="Courier New" pitchFamily="34" charset="0"/>
                 <a:ea typeface="Courier New" pitchFamily="34" charset="-122"/>
@@ -4550,7 +4554,7 @@
             <a:r>
               <a:rPr lang="en-US" sz="1400" dirty="0">
                 <a:solidFill>
-                  <a:srgbClr val="C9D3F5"/>
+                  <a:srgbClr val="1F2429"/>
                 </a:solidFill>
                 <a:latin typeface="Courier New" pitchFamily="34" charset="0"/>
                 <a:ea typeface="Courier New" pitchFamily="34" charset="-122"/>
@@ -4570,7 +4574,7 @@
             <a:r>
               <a:rPr lang="en-US" sz="1400" dirty="0">
                 <a:solidFill>
-                  <a:srgbClr val="C9D3F5"/>
+                  <a:srgbClr val="1F2429"/>
                 </a:solidFill>
                 <a:latin typeface="Courier New" pitchFamily="34" charset="0"/>
                 <a:ea typeface="Courier New" pitchFamily="34" charset="-122"/>
@@ -4783,7 +4787,7 @@
         <p:spPr>
           <a:xfrm>
             <a:off x="640080" y="1965960"/>
-            <a:ext cx="10911535" cy="2011680"/>
+            <a:ext cx="10911535" cy="3657600"/>
           </a:xfrm>
           <a:prstGeom prst="roundRect">
             <a:avLst>
@@ -4814,7 +4818,7 @@
         <p:spPr>
           <a:xfrm>
             <a:off x="868680" y="2103120"/>
-            <a:ext cx="10454335" cy="274320"/>
+            <a:ext cx="10454335" cy="400000"/>
           </a:xfrm>
           <a:prstGeom prst="rect">
             <a:avLst/>
@@ -4830,7 +4834,7 @@
               <a:buNone/>
             </a:pPr>
             <a:r>
-              <a:rPr lang="en-US" sz="1000" b="1" spc="200" kern="0" dirty="0">
+              <a:rPr lang="en-US" sz="1800" b="1" spc="200" kern="0" dirty="0">
                 <a:solidFill>
                   <a:srgbClr val="8A3A12"/>
                 </a:solidFill>
@@ -4840,7 +4844,7 @@
               </a:rPr>
               <a:t>WARNING</a:t>
             </a:r>
-            <a:endParaRPr lang="en-US" sz="1000" dirty="0"/>
+            <a:endParaRPr lang="en-US" sz="1800" dirty="0"/>
           </a:p>
         </p:txBody>
       </p:sp>
@@ -4852,24 +4856,24 @@
         </p:nvSpPr>
         <p:spPr>
           <a:xfrm>
-            <a:off x="868680" y="2404872"/>
-            <a:ext cx="10454335" cy="1417320"/>
-          </a:xfrm>
-          <a:prstGeom prst="rect">
-            <a:avLst/>
-          </a:prstGeom>
-          <a:noFill/>
-          <a:ln/>
-        </p:spPr>
-        <p:txBody>
-          <a:bodyPr wrap="square" lIns="0" tIns="0" rIns="0" bIns="0" rtlCol="0" anchor="t"/>
+            <a:off x="868680" y="2795960"/>
+            <a:ext cx="10454335" cy="2500000"/>
+          </a:xfrm>
+          <a:prstGeom prst="rect">
+            <a:avLst/>
+          </a:prstGeom>
+          <a:noFill/>
+          <a:ln/>
+        </p:spPr>
+        <p:txBody>
+          <a:bodyPr wrap="square" lIns="0" tIns="0" rIns="0" bIns="0" rtlCol="0" anchor="ctr"/>
           <a:lstStyle/>
           <a:p>
             <a:pPr indent="0" marL="0">
               <a:buNone/>
             </a:pPr>
             <a:r>
-              <a:rPr lang="en-US" sz="1250" dirty="0">
+              <a:rPr lang="en-US" sz="2800" dirty="0">
                 <a:solidFill>
                   <a:srgbClr val="26262F"/>
                 </a:solidFill>
@@ -4879,7 +4883,7 @@
               </a:rPr>
               <a:t>A cookie without HttpOnly can be read — and stolen — by any JavaScript running on the page, including malicious injected scripts. Any cookie that identifies a logged-in user, like a session ID, should always be set with HttpOnly: true.</a:t>
             </a:r>
-            <a:endParaRPr lang="en-US" sz="1250" dirty="0"/>
+            <a:endParaRPr lang="en-US" sz="2800" dirty="0"/>
           </a:p>
         </p:txBody>
       </p:sp>
@@ -6812,9 +6816,13 @@
             </a:avLst>
           </a:prstGeom>
           <a:solidFill>
-            <a:srgbClr val="1E1E4C"/>
+            <a:srgbClr val="F7F8F9"/>
           </a:solidFill>
-          <a:ln/>
+          <a:ln w="9525">
+            <a:solidFill>
+              <a:srgbClr val="D0D5DD"/>
+            </a:solidFill>
+          </a:ln>
         </p:spPr>
         <p:txBody>
           <a:bodyPr/>
@@ -6851,7 +6859,7 @@
             <a:r>
               <a:rPr lang="en-US" sz="1184" dirty="0">
                 <a:solidFill>
-                  <a:srgbClr val="C9D3F5"/>
+                  <a:srgbClr val="1F2429"/>
                 </a:solidFill>
                 <a:latin typeface="Courier New" pitchFamily="34" charset="0"/>
                 <a:ea typeface="Courier New" pitchFamily="34" charset="-122"/>
@@ -6871,7 +6879,7 @@
             <a:r>
               <a:rPr lang="en-US" sz="1184" dirty="0">
                 <a:solidFill>
-                  <a:srgbClr val="C9D3F5"/>
+                  <a:srgbClr val="1F2429"/>
                 </a:solidFill>
                 <a:latin typeface="Courier New" pitchFamily="34" charset="0"/>
                 <a:ea typeface="Courier New" pitchFamily="34" charset="-122"/>
@@ -6891,7 +6899,7 @@
             <a:r>
               <a:rPr lang="en-US" sz="1184" dirty="0">
                 <a:solidFill>
-                  <a:srgbClr val="C9D3F5"/>
+                  <a:srgbClr val="1F2429"/>
                 </a:solidFill>
                 <a:latin typeface="Courier New" pitchFamily="34" charset="0"/>
                 <a:ea typeface="Courier New" pitchFamily="34" charset="-122"/>
@@ -6911,7 +6919,7 @@
             <a:r>
               <a:rPr lang="en-US" sz="1184" dirty="0">
                 <a:solidFill>
-                  <a:srgbClr val="C9D3F5"/>
+                  <a:srgbClr val="1F2429"/>
                 </a:solidFill>
                 <a:latin typeface="Courier New" pitchFamily="34" charset="0"/>
                 <a:ea typeface="Courier New" pitchFamily="34" charset="-122"/>
@@ -6940,7 +6948,7 @@
             <a:r>
               <a:rPr lang="en-US" sz="1184" dirty="0">
                 <a:solidFill>
-                  <a:srgbClr val="C9D3F5"/>
+                  <a:srgbClr val="1F2429"/>
                 </a:solidFill>
                 <a:latin typeface="Courier New" pitchFamily="34" charset="0"/>
                 <a:ea typeface="Courier New" pitchFamily="34" charset="-122"/>
@@ -6960,7 +6968,7 @@
             <a:r>
               <a:rPr lang="en-US" sz="1184" dirty="0">
                 <a:solidFill>
-                  <a:srgbClr val="C9D3F5"/>
+                  <a:srgbClr val="1F2429"/>
                 </a:solidFill>
                 <a:latin typeface="Courier New" pitchFamily="34" charset="0"/>
                 <a:ea typeface="Courier New" pitchFamily="34" charset="-122"/>
@@ -6980,7 +6988,7 @@
             <a:r>
               <a:rPr lang="en-US" sz="1184" dirty="0">
                 <a:solidFill>
-                  <a:srgbClr val="C9D3F5"/>
+                  <a:srgbClr val="1F2429"/>
                 </a:solidFill>
                 <a:latin typeface="Courier New" pitchFamily="34" charset="0"/>
                 <a:ea typeface="Courier New" pitchFamily="34" charset="-122"/>
@@ -7000,7 +7008,7 @@
             <a:r>
               <a:rPr lang="en-US" sz="1184" dirty="0">
                 <a:solidFill>
-                  <a:srgbClr val="C9D3F5"/>
+                  <a:srgbClr val="1F2429"/>
                 </a:solidFill>
                 <a:latin typeface="Courier New" pitchFamily="34" charset="0"/>
                 <a:ea typeface="Courier New" pitchFamily="34" charset="-122"/>
@@ -7020,7 +7028,7 @@
             <a:r>
               <a:rPr lang="en-US" sz="1184" dirty="0">
                 <a:solidFill>
-                  <a:srgbClr val="C9D3F5"/>
+                  <a:srgbClr val="1F2429"/>
                 </a:solidFill>
                 <a:latin typeface="Courier New" pitchFamily="34" charset="0"/>
                 <a:ea typeface="Courier New" pitchFamily="34" charset="-122"/>
@@ -7040,7 +7048,7 @@
             <a:r>
               <a:rPr lang="en-US" sz="1184" dirty="0">
                 <a:solidFill>
-                  <a:srgbClr val="C9D3F5"/>
+                  <a:srgbClr val="1F2429"/>
                 </a:solidFill>
                 <a:latin typeface="Courier New" pitchFamily="34" charset="0"/>
                 <a:ea typeface="Courier New" pitchFamily="34" charset="-122"/>
@@ -7060,7 +7068,7 @@
             <a:r>
               <a:rPr lang="en-US" sz="1184" dirty="0">
                 <a:solidFill>
-                  <a:srgbClr val="C9D3F5"/>
+                  <a:srgbClr val="1F2429"/>
                 </a:solidFill>
                 <a:latin typeface="Courier New" pitchFamily="34" charset="0"/>
                 <a:ea typeface="Courier New" pitchFamily="34" charset="-122"/>
@@ -7080,7 +7088,7 @@
             <a:r>
               <a:rPr lang="en-US" sz="1184" dirty="0">
                 <a:solidFill>
-                  <a:srgbClr val="C9D3F5"/>
+                  <a:srgbClr val="1F2429"/>
                 </a:solidFill>
                 <a:latin typeface="Courier New" pitchFamily="34" charset="0"/>
                 <a:ea typeface="Courier New" pitchFamily="34" charset="-122"/>
@@ -7100,7 +7108,7 @@
             <a:r>
               <a:rPr lang="en-US" sz="1184" dirty="0">
                 <a:solidFill>
-                  <a:srgbClr val="C9D3F5"/>
+                  <a:srgbClr val="1F2429"/>
                 </a:solidFill>
                 <a:latin typeface="Courier New" pitchFamily="34" charset="0"/>
                 <a:ea typeface="Courier New" pitchFamily="34" charset="-122"/>
@@ -7120,7 +7128,7 @@
             <a:r>
               <a:rPr lang="en-US" sz="1184" dirty="0">
                 <a:solidFill>
-                  <a:srgbClr val="C9D3F5"/>
+                  <a:srgbClr val="1F2429"/>
                 </a:solidFill>
                 <a:latin typeface="Courier New" pitchFamily="34" charset="0"/>
                 <a:ea typeface="Courier New" pitchFamily="34" charset="-122"/>
@@ -7302,9 +7310,13 @@
             </a:avLst>
           </a:prstGeom>
           <a:solidFill>
-            <a:srgbClr val="1E1E4C"/>
+            <a:srgbClr val="F7F8F9"/>
           </a:solidFill>
-          <a:ln/>
+          <a:ln w="9525">
+            <a:solidFill>
+              <a:srgbClr val="D0D5DD"/>
+            </a:solidFill>
+          </a:ln>
         </p:spPr>
         <p:txBody>
           <a:bodyPr/>
@@ -7341,7 +7353,7 @@
             <a:r>
               <a:rPr lang="en-US" sz="1366" dirty="0">
                 <a:solidFill>
-                  <a:srgbClr val="C9D3F5"/>
+                  <a:srgbClr val="1F2429"/>
                 </a:solidFill>
                 <a:latin typeface="Courier New" pitchFamily="34" charset="0"/>
                 <a:ea typeface="Courier New" pitchFamily="34" charset="-122"/>
@@ -7361,7 +7373,7 @@
             <a:r>
               <a:rPr lang="en-US" sz="1366" dirty="0">
                 <a:solidFill>
-                  <a:srgbClr val="C9D3F5"/>
+                  <a:srgbClr val="1F2429"/>
                 </a:solidFill>
                 <a:latin typeface="Courier New" pitchFamily="34" charset="0"/>
                 <a:ea typeface="Courier New" pitchFamily="34" charset="-122"/>
@@ -7381,7 +7393,7 @@
             <a:r>
               <a:rPr lang="en-US" sz="1366" dirty="0">
                 <a:solidFill>
-                  <a:srgbClr val="C9D3F5"/>
+                  <a:srgbClr val="1F2429"/>
                 </a:solidFill>
                 <a:latin typeface="Courier New" pitchFamily="34" charset="0"/>
                 <a:ea typeface="Courier New" pitchFamily="34" charset="-122"/>
@@ -7401,7 +7413,7 @@
             <a:r>
               <a:rPr lang="en-US" sz="1366" dirty="0">
                 <a:solidFill>
-                  <a:srgbClr val="C9D3F5"/>
+                  <a:srgbClr val="1F2429"/>
                 </a:solidFill>
                 <a:latin typeface="Courier New" pitchFamily="34" charset="0"/>
                 <a:ea typeface="Courier New" pitchFamily="34" charset="-122"/>
@@ -7421,7 +7433,7 @@
             <a:r>
               <a:rPr lang="en-US" sz="1366" dirty="0">
                 <a:solidFill>
-                  <a:srgbClr val="C9D3F5"/>
+                  <a:srgbClr val="1F2429"/>
                 </a:solidFill>
                 <a:latin typeface="Courier New" pitchFamily="34" charset="0"/>
                 <a:ea typeface="Courier New" pitchFamily="34" charset="-122"/>
@@ -7441,7 +7453,7 @@
             <a:r>
               <a:rPr lang="en-US" sz="1366" dirty="0">
                 <a:solidFill>
-                  <a:srgbClr val="C9D3F5"/>
+                  <a:srgbClr val="1F2429"/>
                 </a:solidFill>
                 <a:latin typeface="Courier New" pitchFamily="34" charset="0"/>
                 <a:ea typeface="Courier New" pitchFamily="34" charset="-122"/>
@@ -7470,7 +7482,7 @@
             <a:r>
               <a:rPr lang="en-US" sz="1366" dirty="0">
                 <a:solidFill>
-                  <a:srgbClr val="C9D3F5"/>
+                  <a:srgbClr val="1F2429"/>
                 </a:solidFill>
                 <a:latin typeface="Courier New" pitchFamily="34" charset="0"/>
                 <a:ea typeface="Courier New" pitchFamily="34" charset="-122"/>
@@ -7490,7 +7502,7 @@
             <a:r>
               <a:rPr lang="en-US" sz="1366" dirty="0">
                 <a:solidFill>
-                  <a:srgbClr val="C9D3F5"/>
+                  <a:srgbClr val="1F2429"/>
                 </a:solidFill>
                 <a:latin typeface="Courier New" pitchFamily="34" charset="0"/>
                 <a:ea typeface="Courier New" pitchFamily="34" charset="-122"/>
@@ -7510,7 +7522,7 @@
             <a:r>
               <a:rPr lang="en-US" sz="1366" dirty="0">
                 <a:solidFill>
-                  <a:srgbClr val="C9D3F5"/>
+                  <a:srgbClr val="1F2429"/>
                 </a:solidFill>
                 <a:latin typeface="Courier New" pitchFamily="34" charset="0"/>
                 <a:ea typeface="Courier New" pitchFamily="34" charset="-122"/>
@@ -7530,7 +7542,7 @@
             <a:r>
               <a:rPr lang="en-US" sz="1366" dirty="0">
                 <a:solidFill>
-                  <a:srgbClr val="C9D3F5"/>
+                  <a:srgbClr val="1F2429"/>
                 </a:solidFill>
                 <a:latin typeface="Courier New" pitchFamily="34" charset="0"/>
                 <a:ea typeface="Courier New" pitchFamily="34" charset="-122"/>
@@ -7550,7 +7562,7 @@
             <a:r>
               <a:rPr lang="en-US" sz="1366" dirty="0">
                 <a:solidFill>
-                  <a:srgbClr val="C9D3F5"/>
+                  <a:srgbClr val="1F2429"/>
                 </a:solidFill>
                 <a:latin typeface="Courier New" pitchFamily="34" charset="0"/>
                 <a:ea typeface="Courier New" pitchFamily="34" charset="-122"/>
@@ -7570,7 +7582,7 @@
             <a:r>
               <a:rPr lang="en-US" sz="1366" dirty="0">
                 <a:solidFill>
-                  <a:srgbClr val="C9D3F5"/>
+                  <a:srgbClr val="1F2429"/>
                 </a:solidFill>
                 <a:latin typeface="Courier New" pitchFamily="34" charset="0"/>
                 <a:ea typeface="Courier New" pitchFamily="34" charset="-122"/>
@@ -7752,9 +7764,13 @@
             </a:avLst>
           </a:prstGeom>
           <a:solidFill>
-            <a:srgbClr val="1E1E4C"/>
+            <a:srgbClr val="F7F8F9"/>
           </a:solidFill>
-          <a:ln/>
+          <a:ln w="9525">
+            <a:solidFill>
+              <a:srgbClr val="D0D5DD"/>
+            </a:solidFill>
+          </a:ln>
         </p:spPr>
         <p:txBody>
           <a:bodyPr/>
@@ -7791,7 +7807,7 @@
             <a:r>
               <a:rPr lang="en-US" sz="1400" dirty="0">
                 <a:solidFill>
-                  <a:srgbClr val="C9D3F5"/>
+                  <a:srgbClr val="1F2429"/>
                 </a:solidFill>
                 <a:latin typeface="Courier New" pitchFamily="34" charset="0"/>
                 <a:ea typeface="Courier New" pitchFamily="34" charset="-122"/>
@@ -7811,7 +7827,7 @@
             <a:r>
               <a:rPr lang="en-US" sz="1400" dirty="0">
                 <a:solidFill>
-                  <a:srgbClr val="C9D3F5"/>
+                  <a:srgbClr val="1F2429"/>
                 </a:solidFill>
                 <a:latin typeface="Courier New" pitchFamily="34" charset="0"/>
                 <a:ea typeface="Courier New" pitchFamily="34" charset="-122"/>
@@ -7831,7 +7847,7 @@
             <a:r>
               <a:rPr lang="en-US" sz="1400" dirty="0">
                 <a:solidFill>
-                  <a:srgbClr val="C9D3F5"/>
+                  <a:srgbClr val="1F2429"/>
                 </a:solidFill>
                 <a:latin typeface="Courier New" pitchFamily="34" charset="0"/>
                 <a:ea typeface="Courier New" pitchFamily="34" charset="-122"/>
@@ -7851,7 +7867,7 @@
             <a:r>
               <a:rPr lang="en-US" sz="1400" dirty="0">
                 <a:solidFill>
-                  <a:srgbClr val="C9D3F5"/>
+                  <a:srgbClr val="1F2429"/>
                 </a:solidFill>
                 <a:latin typeface="Courier New" pitchFamily="34" charset="0"/>
                 <a:ea typeface="Courier New" pitchFamily="34" charset="-122"/>
@@ -7871,7 +7887,7 @@
             <a:r>
               <a:rPr lang="en-US" sz="1400" dirty="0">
                 <a:solidFill>
-                  <a:srgbClr val="C9D3F5"/>
+                  <a:srgbClr val="1F2429"/>
                 </a:solidFill>
                 <a:latin typeface="Courier New" pitchFamily="34" charset="0"/>
                 <a:ea typeface="Courier New" pitchFamily="34" charset="-122"/>
@@ -7900,7 +7916,7 @@
             <a:r>
               <a:rPr lang="en-US" sz="1400" dirty="0">
                 <a:solidFill>
-                  <a:srgbClr val="C9D3F5"/>
+                  <a:srgbClr val="1F2429"/>
                 </a:solidFill>
                 <a:latin typeface="Courier New" pitchFamily="34" charset="0"/>
                 <a:ea typeface="Courier New" pitchFamily="34" charset="-122"/>
@@ -10287,7 +10303,7 @@
         <p:spPr>
           <a:xfrm>
             <a:off x="640080" y="1965960"/>
-            <a:ext cx="10911535" cy="2011680"/>
+            <a:ext cx="10911535" cy="3657600"/>
           </a:xfrm>
           <a:prstGeom prst="roundRect">
             <a:avLst>
@@ -10318,7 +10334,7 @@
         <p:spPr>
           <a:xfrm>
             <a:off x="868680" y="2103120"/>
-            <a:ext cx="10454335" cy="274320"/>
+            <a:ext cx="10454335" cy="400000"/>
           </a:xfrm>
           <a:prstGeom prst="rect">
             <a:avLst/>
@@ -10334,7 +10350,7 @@
               <a:buNone/>
             </a:pPr>
             <a:r>
-              <a:rPr lang="en-US" sz="1000" b="1" spc="200" kern="0" dirty="0">
+              <a:rPr lang="en-US" sz="1800" b="1" spc="200" kern="0" dirty="0">
                 <a:solidFill>
                   <a:srgbClr val="1F7A46"/>
                 </a:solidFill>
@@ -10344,7 +10360,7 @@
               </a:rPr>
               <a:t>TIP</a:t>
             </a:r>
-            <a:endParaRPr lang="en-US" sz="1000" dirty="0"/>
+            <a:endParaRPr lang="en-US" sz="1800" dirty="0"/>
           </a:p>
         </p:txBody>
       </p:sp>
@@ -10356,24 +10372,24 @@
         </p:nvSpPr>
         <p:spPr>
           <a:xfrm>
-            <a:off x="868680" y="2404872"/>
-            <a:ext cx="10454335" cy="1417320"/>
-          </a:xfrm>
-          <a:prstGeom prst="rect">
-            <a:avLst/>
-          </a:prstGeom>
-          <a:noFill/>
-          <a:ln/>
-        </p:spPr>
-        <p:txBody>
-          <a:bodyPr wrap="square" lIns="0" tIns="0" rIns="0" bIns="0" rtlCol="0" anchor="t"/>
+            <a:off x="868680" y="2795960"/>
+            <a:ext cx="10454335" cy="2500000"/>
+          </a:xfrm>
+          <a:prstGeom prst="rect">
+            <a:avLst/>
+          </a:prstGeom>
+          <a:noFill/>
+          <a:ln/>
+        </p:spPr>
+        <p:txBody>
+          <a:bodyPr wrap="square" lIns="0" tIns="0" rIns="0" bIns="0" rtlCol="0" anchor="ctr"/>
           <a:lstStyle/>
           <a:p>
             <a:pPr indent="0" marL="0">
               <a:buNone/>
             </a:pPr>
             <a:r>
-              <a:rPr lang="en-US" sz="1250" dirty="0">
+              <a:rPr lang="en-US" sz="2800" dirty="0">
                 <a:solidFill>
                   <a:srgbClr val="26262F"/>
                 </a:solidFill>
@@ -10383,7 +10399,7 @@
               </a:rPr>
               <a:t>Signed cookies keep the actual data in the cookie, but cryptographically sign it so the server can detect tampering. This adds tamper-detection but not secrecy — the data is still visible to the user, just not undetectably editable. Still not the right choice for genuinely secret data.</a:t>
             </a:r>
-            <a:endParaRPr lang="en-US" sz="1250" dirty="0"/>
+            <a:endParaRPr lang="en-US" sz="2800" dirty="0"/>
           </a:p>
         </p:txBody>
       </p:sp>
@@ -12577,7 +12593,7 @@
         <p:spPr>
           <a:xfrm>
             <a:off x="640080" y="1965960"/>
-            <a:ext cx="10911535" cy="1920240"/>
+            <a:ext cx="10911535" cy="3657600"/>
           </a:xfrm>
           <a:prstGeom prst="roundRect">
             <a:avLst>
@@ -12608,7 +12624,7 @@
         <p:spPr>
           <a:xfrm>
             <a:off x="868680" y="2103120"/>
-            <a:ext cx="10454335" cy="274320"/>
+            <a:ext cx="10454335" cy="400000"/>
           </a:xfrm>
           <a:prstGeom prst="rect">
             <a:avLst/>
@@ -12624,7 +12640,7 @@
               <a:buNone/>
             </a:pPr>
             <a:r>
-              <a:rPr lang="en-US" sz="1000" b="1" spc="200" kern="0" dirty="0">
+              <a:rPr lang="en-US" sz="1800" b="1" spc="200" kern="0" dirty="0">
                 <a:solidFill>
                   <a:srgbClr val="8A3A12"/>
                 </a:solidFill>
@@ -12634,7 +12650,7 @@
               </a:rPr>
               <a:t>WARNING</a:t>
             </a:r>
-            <a:endParaRPr lang="en-US" sz="1000" dirty="0"/>
+            <a:endParaRPr lang="en-US" sz="1800" dirty="0"/>
           </a:p>
         </p:txBody>
       </p:sp>
@@ -12646,24 +12662,24 @@
         </p:nvSpPr>
         <p:spPr>
           <a:xfrm>
-            <a:off x="868680" y="2404872"/>
-            <a:ext cx="10454335" cy="1325880"/>
-          </a:xfrm>
-          <a:prstGeom prst="rect">
-            <a:avLst/>
-          </a:prstGeom>
-          <a:noFill/>
-          <a:ln/>
-        </p:spPr>
-        <p:txBody>
-          <a:bodyPr wrap="square" lIns="0" tIns="0" rIns="0" bIns="0" rtlCol="0" anchor="t"/>
+            <a:off x="868680" y="2795960"/>
+            <a:ext cx="10454335" cy="2500000"/>
+          </a:xfrm>
+          <a:prstGeom prst="rect">
+            <a:avLst/>
+          </a:prstGeom>
+          <a:noFill/>
+          <a:ln/>
+        </p:spPr>
+        <p:txBody>
+          <a:bodyPr wrap="square" lIns="0" tIns="0" rIns="0" bIns="0" rtlCol="0" anchor="ctr"/>
           <a:lstStyle/>
           <a:p>
             <a:pPr indent="0" marL="0">
               <a:buNone/>
             </a:pPr>
             <a:r>
-              <a:rPr lang="en-US" sz="1250" dirty="0">
+              <a:rPr lang="en-US" sz="2800" dirty="0">
                 <a:solidFill>
                   <a:srgbClr val="26262F"/>
                 </a:solidFill>
@@ -12673,7 +12689,7 @@
               </a:rPr>
               <a:t>Destroy the session on the server side, not just by clearing the cookie in the browser — otherwise, an attacker who somehow captured the old cookie value could still use it after the user thought they had logged out.</a:t>
             </a:r>
-            <a:endParaRPr lang="en-US" sz="1250" dirty="0"/>
+            <a:endParaRPr lang="en-US" sz="2800" dirty="0"/>
           </a:p>
         </p:txBody>
       </p:sp>
@@ -15610,9 +15626,13 @@
             </a:avLst>
           </a:prstGeom>
           <a:solidFill>
-            <a:srgbClr val="1E1E4C"/>
+            <a:srgbClr val="F7F8F9"/>
           </a:solidFill>
-          <a:ln/>
+          <a:ln w="9525">
+            <a:solidFill>
+              <a:srgbClr val="D0D5DD"/>
+            </a:solidFill>
+          </a:ln>
         </p:spPr>
         <p:txBody>
           <a:bodyPr/>
@@ -15649,7 +15669,7 @@
             <a:r>
               <a:rPr lang="en-US" sz="1400" dirty="0">
                 <a:solidFill>
-                  <a:srgbClr val="C9D3F5"/>
+                  <a:srgbClr val="1F2429"/>
                 </a:solidFill>
                 <a:latin typeface="Courier New" pitchFamily="34" charset="0"/>
                 <a:ea typeface="Courier New" pitchFamily="34" charset="-122"/>
@@ -15669,7 +15689,7 @@
             <a:r>
               <a:rPr lang="en-US" sz="1400" dirty="0">
                 <a:solidFill>
-                  <a:srgbClr val="C9D3F5"/>
+                  <a:srgbClr val="1F2429"/>
                 </a:solidFill>
                 <a:latin typeface="Courier New" pitchFamily="34" charset="0"/>
                 <a:ea typeface="Courier New" pitchFamily="34" charset="-122"/>
@@ -15689,7 +15709,7 @@
             <a:r>
               <a:rPr lang="en-US" sz="1400" dirty="0">
                 <a:solidFill>
-                  <a:srgbClr val="C9D3F5"/>
+                  <a:srgbClr val="1F2429"/>
                 </a:solidFill>
                 <a:latin typeface="Courier New" pitchFamily="34" charset="0"/>
                 <a:ea typeface="Courier New" pitchFamily="34" charset="-122"/>
@@ -15709,7 +15729,7 @@
             <a:r>
               <a:rPr lang="en-US" sz="1400" dirty="0">
                 <a:solidFill>
-                  <a:srgbClr val="C9D3F5"/>
+                  <a:srgbClr val="1F2429"/>
                 </a:solidFill>
                 <a:latin typeface="Courier New" pitchFamily="34" charset="0"/>
                 <a:ea typeface="Courier New" pitchFamily="34" charset="-122"/>
@@ -15738,7 +15758,7 @@
             <a:r>
               <a:rPr lang="en-US" sz="1400" dirty="0">
                 <a:solidFill>
-                  <a:srgbClr val="C9D3F5"/>
+                  <a:srgbClr val="1F2429"/>
                 </a:solidFill>
                 <a:latin typeface="Courier New" pitchFamily="34" charset="0"/>
                 <a:ea typeface="Courier New" pitchFamily="34" charset="-122"/>
@@ -15758,7 +15778,7 @@
             <a:r>
               <a:rPr lang="en-US" sz="1400" dirty="0">
                 <a:solidFill>
-                  <a:srgbClr val="C9D3F5"/>
+                  <a:srgbClr val="1F2429"/>
                 </a:solidFill>
                 <a:latin typeface="Courier New" pitchFamily="34" charset="0"/>
                 <a:ea typeface="Courier New" pitchFamily="34" charset="-122"/>
@@ -15778,7 +15798,7 @@
             <a:r>
               <a:rPr lang="en-US" sz="1400" dirty="0">
                 <a:solidFill>
-                  <a:srgbClr val="C9D3F5"/>
+                  <a:srgbClr val="1F2429"/>
                 </a:solidFill>
                 <a:latin typeface="Courier New" pitchFamily="34" charset="0"/>
                 <a:ea typeface="Courier New" pitchFamily="34" charset="-122"/>
@@ -15798,7 +15818,7 @@
             <a:r>
               <a:rPr lang="en-US" sz="1400" dirty="0">
                 <a:solidFill>
-                  <a:srgbClr val="C9D3F5"/>
+                  <a:srgbClr val="1F2429"/>
                 </a:solidFill>
                 <a:latin typeface="Courier New" pitchFamily="34" charset="0"/>
                 <a:ea typeface="Courier New" pitchFamily="34" charset="-122"/>
@@ -16011,7 +16031,7 @@
         <p:spPr>
           <a:xfrm>
             <a:off x="640080" y="1965960"/>
-            <a:ext cx="10911535" cy="2011680"/>
+            <a:ext cx="10911535" cy="3657600"/>
           </a:xfrm>
           <a:prstGeom prst="roundRect">
             <a:avLst>
@@ -16042,7 +16062,7 @@
         <p:spPr>
           <a:xfrm>
             <a:off x="868680" y="2103120"/>
-            <a:ext cx="10454335" cy="274320"/>
+            <a:ext cx="10454335" cy="400000"/>
           </a:xfrm>
           <a:prstGeom prst="rect">
             <a:avLst/>
@@ -16058,7 +16078,7 @@
               <a:buNone/>
             </a:pPr>
             <a:r>
-              <a:rPr lang="en-US" sz="1000" b="1" spc="200" kern="0" dirty="0">
+              <a:rPr lang="en-US" sz="1800" b="1" spc="200" kern="0" dirty="0">
                 <a:solidFill>
                   <a:srgbClr val="33459E"/>
                 </a:solidFill>
@@ -16068,7 +16088,7 @@
               </a:rPr>
               <a:t>NOTE</a:t>
             </a:r>
-            <a:endParaRPr lang="en-US" sz="1000" dirty="0"/>
+            <a:endParaRPr lang="en-US" sz="1800" dirty="0"/>
           </a:p>
         </p:txBody>
       </p:sp>
@@ -16080,24 +16100,24 @@
         </p:nvSpPr>
         <p:spPr>
           <a:xfrm>
-            <a:off x="868680" y="2404872"/>
-            <a:ext cx="10454335" cy="1417320"/>
-          </a:xfrm>
-          <a:prstGeom prst="rect">
-            <a:avLst/>
-          </a:prstGeom>
-          <a:noFill/>
-          <a:ln/>
-        </p:spPr>
-        <p:txBody>
-          <a:bodyPr wrap="square" lIns="0" tIns="0" rIns="0" bIns="0" rtlCol="0" anchor="t"/>
+            <a:off x="868680" y="2795960"/>
+            <a:ext cx="10454335" cy="2500000"/>
+          </a:xfrm>
+          <a:prstGeom prst="rect">
+            <a:avLst/>
+          </a:prstGeom>
+          <a:noFill/>
+          <a:ln/>
+        </p:spPr>
+        <p:txBody>
+          <a:bodyPr wrap="square" lIns="0" tIns="0" rIns="0" bIns="0" rtlCol="0" anchor="ctr"/>
           <a:lstStyle/>
           <a:p>
             <a:pPr indent="0" marL="0">
               <a:buNone/>
             </a:pPr>
             <a:r>
-              <a:rPr lang="en-US" sz="1250" dirty="0">
+              <a:rPr lang="en-US" sz="2800" dirty="0">
                 <a:solidFill>
                   <a:srgbClr val="26262F"/>
                 </a:solidFill>
@@ -16107,7 +16127,7 @@
               </a:rPr>
               <a:t>Express does not parse incoming cookies into req.cookies by default — you need the small cookie-parser package (npm install cookie-parser, then app.use(require('cookie-parser')())) to read cookies sent by the browser. Setting cookies with res.cookie(), however, works out of the box.</a:t>
             </a:r>
-            <a:endParaRPr lang="en-US" sz="1250" dirty="0"/>
+            <a:endParaRPr lang="en-US" sz="2800" dirty="0"/>
           </a:p>
         </p:txBody>
       </p:sp>
